--- a/slides/0204-Scientific_Literature.pptx
+++ b/slides/0204-Scientific_Literature.pptx
@@ -1,19 +1,18 @@
 
 <file path=ppt/presentation.xml><?xml version="1.0" encoding="utf-8"?>
-<p:presentation xmlns:a="http://schemas.openxmlformats.org/drawingml/2006/main" xmlns:r="http://schemas.openxmlformats.org/officeDocument/2006/relationships" xmlns:p="http://schemas.openxmlformats.org/presentationml/2006/main" xmlns:m="http://schemas.openxmlformats.org/officeDocument/2006/math" xmlns:a14="http://schemas.microsoft.com/office/drawing/2010/main">
+<p:presentation xmlns:a="http://schemas.openxmlformats.org/drawingml/2006/main" xmlns:r="http://schemas.openxmlformats.org/officeDocument/2006/relationships" xmlns:p="http://schemas.openxmlformats.org/presentationml/2006/main">
   <p:sldMasterIdLst>
-    <p:sldMasterId id="2147483648" r:id="rId5"/>
+    <p:sldMasterId id="2147483648" r:id="rId1"/>
   </p:sldMasterIdLst>
   <p:notesMasterIdLst>
     <p:notesMasterId r:id="rId7"/>
   </p:notesMasterIdLst>
   <p:sldIdLst>
-    <p:sldId id="256" r:id="rId8"/>
-    <p:sldId id="257" r:id="rId9"/>
-    <p:sldId id="258" r:id="rId10"/>
-    <p:sldId id="259" r:id="rId11"/>
-    <p:sldId id="260" r:id="rId12"/>
-    <p:sldId id="261" r:id="rId13"/>
+    <p:sldId id="256" r:id="rId2"/>
+    <p:sldId id="258" r:id="rId3"/>
+    <p:sldId id="259" r:id="rId4"/>
+    <p:sldId id="260" r:id="rId5"/>
+    <p:sldId id="261" r:id="rId6"/>
   </p:sldIdLst>
   <p:sldSz cx="24384000" cy="13716000"/>
   <p:notesSz cx="6858000" cy="9144000"/>
@@ -33,7 +32,7 @@
       <a:buFontTx/>
       <a:buNone/>
       <a:tabLst/>
-      <a:defRPr b="0" baseline="0" cap="none" i="0" spc="0" strike="noStrike" sz="1800" u="none" kumimoji="0" normalizeH="0">
+      <a:defRPr kumimoji="0" sz="1800" b="0" i="0" u="none" strike="noStrike" cap="none" spc="0" normalizeH="0" baseline="0">
         <a:ln>
           <a:noFill/>
         </a:ln>
@@ -59,7 +58,7 @@
       <a:buFontTx/>
       <a:buNone/>
       <a:tabLst/>
-      <a:defRPr b="0" baseline="0" cap="none" i="0" spc="0" strike="noStrike" sz="3200" u="none" kumimoji="0" normalizeH="0">
+      <a:defRPr kumimoji="0" sz="3200" b="0" i="0" u="none" strike="noStrike" cap="none" spc="0" normalizeH="0" baseline="0">
         <a:ln>
           <a:noFill/>
         </a:ln>
@@ -89,7 +88,7 @@
       <a:buFontTx/>
       <a:buNone/>
       <a:tabLst/>
-      <a:defRPr b="0" baseline="0" cap="none" i="0" spc="0" strike="noStrike" sz="3200" u="none" kumimoji="0" normalizeH="0">
+      <a:defRPr kumimoji="0" sz="3200" b="0" i="0" u="none" strike="noStrike" cap="none" spc="0" normalizeH="0" baseline="0">
         <a:ln>
           <a:noFill/>
         </a:ln>
@@ -119,7 +118,7 @@
       <a:buFontTx/>
       <a:buNone/>
       <a:tabLst/>
-      <a:defRPr b="0" baseline="0" cap="none" i="0" spc="0" strike="noStrike" sz="3200" u="none" kumimoji="0" normalizeH="0">
+      <a:defRPr kumimoji="0" sz="3200" b="0" i="0" u="none" strike="noStrike" cap="none" spc="0" normalizeH="0" baseline="0">
         <a:ln>
           <a:noFill/>
         </a:ln>
@@ -149,7 +148,7 @@
       <a:buFontTx/>
       <a:buNone/>
       <a:tabLst/>
-      <a:defRPr b="0" baseline="0" cap="none" i="0" spc="0" strike="noStrike" sz="3200" u="none" kumimoji="0" normalizeH="0">
+      <a:defRPr kumimoji="0" sz="3200" b="0" i="0" u="none" strike="noStrike" cap="none" spc="0" normalizeH="0" baseline="0">
         <a:ln>
           <a:noFill/>
         </a:ln>
@@ -179,7 +178,7 @@
       <a:buFontTx/>
       <a:buNone/>
       <a:tabLst/>
-      <a:defRPr b="0" baseline="0" cap="none" i="0" spc="0" strike="noStrike" sz="3200" u="none" kumimoji="0" normalizeH="0">
+      <a:defRPr kumimoji="0" sz="3200" b="0" i="0" u="none" strike="noStrike" cap="none" spc="0" normalizeH="0" baseline="0">
         <a:ln>
           <a:noFill/>
         </a:ln>
@@ -209,7 +208,7 @@
       <a:buFontTx/>
       <a:buNone/>
       <a:tabLst/>
-      <a:defRPr b="0" baseline="0" cap="none" i="0" spc="0" strike="noStrike" sz="3200" u="none" kumimoji="0" normalizeH="0">
+      <a:defRPr kumimoji="0" sz="3200" b="0" i="0" u="none" strike="noStrike" cap="none" spc="0" normalizeH="0" baseline="0">
         <a:ln>
           <a:noFill/>
         </a:ln>
@@ -239,7 +238,7 @@
       <a:buFontTx/>
       <a:buNone/>
       <a:tabLst/>
-      <a:defRPr b="0" baseline="0" cap="none" i="0" spc="0" strike="noStrike" sz="3200" u="none" kumimoji="0" normalizeH="0">
+      <a:defRPr kumimoji="0" sz="3200" b="0" i="0" u="none" strike="noStrike" cap="none" spc="0" normalizeH="0" baseline="0">
         <a:ln>
           <a:noFill/>
         </a:ln>
@@ -269,7 +268,7 @@
       <a:buFontTx/>
       <a:buNone/>
       <a:tabLst/>
-      <a:defRPr b="0" baseline="0" cap="none" i="0" spc="0" strike="noStrike" sz="3200" u="none" kumimoji="0" normalizeH="0">
+      <a:defRPr kumimoji="0" sz="3200" b="0" i="0" u="none" strike="noStrike" cap="none" spc="0" normalizeH="0" baseline="0">
         <a:ln>
           <a:noFill/>
         </a:ln>
@@ -299,7 +298,7 @@
       <a:buFontTx/>
       <a:buNone/>
       <a:tabLst/>
-      <a:defRPr b="0" baseline="0" cap="none" i="0" spc="0" strike="noStrike" sz="3200" u="none" kumimoji="0" normalizeH="0">
+      <a:defRPr kumimoji="0" sz="3200" b="0" i="0" u="none" strike="noStrike" cap="none" spc="0" normalizeH="0" baseline="0">
         <a:ln>
           <a:noFill/>
         </a:ln>
@@ -315,16 +314,22 @@
       </a:defRPr>
     </a:lvl9pPr>
   </p:defaultTextStyle>
+  <p:extLst>
+    <p:ext uri="{EFAFB233-063F-42B5-8137-9DF3F51BA10A}">
+      <p15:sldGuideLst xmlns:p15="http://schemas.microsoft.com/office/powerpoint/2012/main"/>
+    </p:ext>
+  </p:extLst>
 </p:presentation>
 </file>
 
-<file path=ppt/commentAuthors.xml><?xml version="1.0" encoding="utf-8"?>
-<p:cmAuthorLst xmlns:a="http://schemas.openxmlformats.org/drawingml/2006/main" xmlns:r="http://schemas.openxmlformats.org/officeDocument/2006/relationships" xmlns:p="http://schemas.openxmlformats.org/presentationml/2006/main" xmlns:m="http://schemas.openxmlformats.org/officeDocument/2006/math" xmlns:a14="http://schemas.microsoft.com/office/drawing/2010/main"/>
-</file>
-
 <file path=ppt/notesMasters/notesMaster1.xml><?xml version="1.0" encoding="utf-8"?>
-<p:notesMaster xmlns:a="http://schemas.openxmlformats.org/drawingml/2006/main" xmlns:r="http://schemas.openxmlformats.org/officeDocument/2006/relationships" xmlns:p="http://schemas.openxmlformats.org/presentationml/2006/main" xmlns:m="http://schemas.openxmlformats.org/officeDocument/2006/math" xmlns:a14="http://schemas.microsoft.com/office/drawing/2010/main">
+<p:notesMaster xmlns:a="http://schemas.openxmlformats.org/drawingml/2006/main" xmlns:r="http://schemas.openxmlformats.org/officeDocument/2006/relationships" xmlns:p="http://schemas.openxmlformats.org/presentationml/2006/main">
   <p:cSld>
+    <p:bg>
+      <p:bgRef idx="1001">
+        <a:schemeClr val="bg1"/>
+      </p:bgRef>
+    </p:bg>
     <p:spTree>
       <p:nvGrpSpPr>
         <p:cNvPr id="1" name=""/>
@@ -342,7 +347,9 @@
       <p:sp>
         <p:nvSpPr>
           <p:cNvPr id="134" name="Shape 134"/>
-          <p:cNvSpPr/>
+          <p:cNvSpPr>
+            <a:spLocks noGrp="1" noRot="1" noChangeAspect="1"/>
+          </p:cNvSpPr>
           <p:nvPr>
             <p:ph type="sldImg"/>
           </p:nvPr>
@@ -360,14 +367,16 @@
           <a:bodyPr/>
           <a:lstStyle/>
           <a:p>
-            <a:pPr/>
+            <a:endParaRPr/>
           </a:p>
         </p:txBody>
       </p:sp>
       <p:sp>
         <p:nvSpPr>
           <p:cNvPr id="135" name="Shape 135"/>
-          <p:cNvSpPr/>
+          <p:cNvSpPr>
+            <a:spLocks noGrp="1"/>
+          </p:cNvSpPr>
           <p:nvPr>
             <p:ph type="body" sz="quarter" idx="1"/>
           </p:nvPr>
@@ -385,7 +394,7 @@
           <a:bodyPr/>
           <a:lstStyle/>
           <a:p>
-            <a:pPr/>
+            <a:endParaRPr/>
           </a:p>
         </p:txBody>
       </p:sp>
@@ -398,9 +407,9 @@
         <a:spcPct val="125000"/>
       </a:lnSpc>
       <a:defRPr sz="2400">
-        <a:latin typeface="Avenir Roman"/>
-        <a:ea typeface="Avenir Roman"/>
-        <a:cs typeface="Avenir Roman"/>
+        <a:latin typeface="Avenir"/>
+        <a:ea typeface="Avenir"/>
+        <a:cs typeface="Avenir"/>
         <a:sym typeface="Avenir Roman"/>
       </a:defRPr>
     </a:lvl1pPr>
@@ -409,9 +418,9 @@
         <a:spcPct val="125000"/>
       </a:lnSpc>
       <a:defRPr sz="2400">
-        <a:latin typeface="Avenir Roman"/>
-        <a:ea typeface="Avenir Roman"/>
-        <a:cs typeface="Avenir Roman"/>
+        <a:latin typeface="Avenir"/>
+        <a:ea typeface="Avenir"/>
+        <a:cs typeface="Avenir"/>
         <a:sym typeface="Avenir Roman"/>
       </a:defRPr>
     </a:lvl2pPr>
@@ -420,9 +429,9 @@
         <a:spcPct val="125000"/>
       </a:lnSpc>
       <a:defRPr sz="2400">
-        <a:latin typeface="Avenir Roman"/>
-        <a:ea typeface="Avenir Roman"/>
-        <a:cs typeface="Avenir Roman"/>
+        <a:latin typeface="Avenir"/>
+        <a:ea typeface="Avenir"/>
+        <a:cs typeface="Avenir"/>
         <a:sym typeface="Avenir Roman"/>
       </a:defRPr>
     </a:lvl3pPr>
@@ -431,9 +440,9 @@
         <a:spcPct val="125000"/>
       </a:lnSpc>
       <a:defRPr sz="2400">
-        <a:latin typeface="Avenir Roman"/>
-        <a:ea typeface="Avenir Roman"/>
-        <a:cs typeface="Avenir Roman"/>
+        <a:latin typeface="Avenir"/>
+        <a:ea typeface="Avenir"/>
+        <a:cs typeface="Avenir"/>
         <a:sym typeface="Avenir Roman"/>
       </a:defRPr>
     </a:lvl4pPr>
@@ -442,9 +451,9 @@
         <a:spcPct val="125000"/>
       </a:lnSpc>
       <a:defRPr sz="2400">
-        <a:latin typeface="Avenir Roman"/>
-        <a:ea typeface="Avenir Roman"/>
-        <a:cs typeface="Avenir Roman"/>
+        <a:latin typeface="Avenir"/>
+        <a:ea typeface="Avenir"/>
+        <a:cs typeface="Avenir"/>
         <a:sym typeface="Avenir Roman"/>
       </a:defRPr>
     </a:lvl5pPr>
@@ -453,9 +462,9 @@
         <a:spcPct val="125000"/>
       </a:lnSpc>
       <a:defRPr sz="2400">
-        <a:latin typeface="Avenir Roman"/>
-        <a:ea typeface="Avenir Roman"/>
-        <a:cs typeface="Avenir Roman"/>
+        <a:latin typeface="Avenir"/>
+        <a:ea typeface="Avenir"/>
+        <a:cs typeface="Avenir"/>
         <a:sym typeface="Avenir Roman"/>
       </a:defRPr>
     </a:lvl6pPr>
@@ -464,9 +473,9 @@
         <a:spcPct val="125000"/>
       </a:lnSpc>
       <a:defRPr sz="2400">
-        <a:latin typeface="Avenir Roman"/>
-        <a:ea typeface="Avenir Roman"/>
-        <a:cs typeface="Avenir Roman"/>
+        <a:latin typeface="Avenir"/>
+        <a:ea typeface="Avenir"/>
+        <a:cs typeface="Avenir"/>
         <a:sym typeface="Avenir Roman"/>
       </a:defRPr>
     </a:lvl7pPr>
@@ -475,9 +484,9 @@
         <a:spcPct val="125000"/>
       </a:lnSpc>
       <a:defRPr sz="2400">
-        <a:latin typeface="Avenir Roman"/>
-        <a:ea typeface="Avenir Roman"/>
-        <a:cs typeface="Avenir Roman"/>
+        <a:latin typeface="Avenir"/>
+        <a:ea typeface="Avenir"/>
+        <a:cs typeface="Avenir"/>
         <a:sym typeface="Avenir Roman"/>
       </a:defRPr>
     </a:lvl8pPr>
@@ -486,9 +495,9 @@
         <a:spcPct val="125000"/>
       </a:lnSpc>
       <a:defRPr sz="2400">
-        <a:latin typeface="Avenir Roman"/>
-        <a:ea typeface="Avenir Roman"/>
-        <a:cs typeface="Avenir Roman"/>
+        <a:latin typeface="Avenir"/>
+        <a:ea typeface="Avenir"/>
+        <a:cs typeface="Avenir"/>
         <a:sym typeface="Avenir Roman"/>
       </a:defRPr>
     </a:lvl9pPr>
@@ -497,7 +506,7 @@
 </file>
 
 <file path=ppt/slideLayouts/slideLayout1.xml><?xml version="1.0" encoding="utf-8"?>
-<p:sldLayout xmlns:a="http://schemas.openxmlformats.org/drawingml/2006/main" xmlns:r="http://schemas.openxmlformats.org/officeDocument/2006/relationships" xmlns:p="http://schemas.openxmlformats.org/presentationml/2006/main" xmlns:m="http://schemas.openxmlformats.org/officeDocument/2006/math" xmlns:a14="http://schemas.microsoft.com/office/drawing/2010/main" type="title" showMasterSp="1" showMasterPhAnim="1">
+<p:sldLayout xmlns:a="http://schemas.openxmlformats.org/drawingml/2006/main" xmlns:r="http://schemas.openxmlformats.org/officeDocument/2006/relationships" xmlns:p="http://schemas.openxmlformats.org/presentationml/2006/main" type="title">
   <p:cSld name="Title &amp; Subtitle">
     <p:spTree>
       <p:nvGrpSpPr>
@@ -516,7 +525,9 @@
       <p:sp>
         <p:nvSpPr>
           <p:cNvPr id="11" name="Title Text"/>
-          <p:cNvSpPr txBox="1"/>
+          <p:cNvSpPr txBox="1">
+            <a:spLocks noGrp="1"/>
+          </p:cNvSpPr>
           <p:nvPr>
             <p:ph type="title"/>
           </p:nvPr>
@@ -534,7 +545,6 @@
           <a:bodyPr anchor="b"/>
           <a:lstStyle/>
           <a:p>
-            <a:pPr/>
             <a:r>
               <a:t>Title Text</a:t>
             </a:r>
@@ -544,7 +554,9 @@
       <p:sp>
         <p:nvSpPr>
           <p:cNvPr id="12" name="Body Level One…"/>
-          <p:cNvSpPr txBox="1"/>
+          <p:cNvSpPr txBox="1">
+            <a:spLocks noGrp="1"/>
+          </p:cNvSpPr>
           <p:nvPr>
             <p:ph type="body" sz="quarter" idx="1"/>
           </p:nvPr>
@@ -588,7 +600,6 @@
             </a:lvl5pPr>
           </a:lstStyle>
           <a:p>
-            <a:pPr/>
             <a:r>
               <a:t>Body Level One</a:t>
             </a:r>
@@ -622,7 +633,9 @@
       <p:sp>
         <p:nvSpPr>
           <p:cNvPr id="13" name="Slide Number"/>
-          <p:cNvSpPr txBox="1"/>
+          <p:cNvSpPr txBox="1">
+            <a:spLocks noGrp="1"/>
+          </p:cNvSpPr>
           <p:nvPr>
             <p:ph type="sldNum" sz="quarter" idx="2"/>
           </p:nvPr>
@@ -636,8 +649,10 @@
           <a:bodyPr/>
           <a:lstStyle/>
           <a:p>
-            <a:pPr/>
-            <a:fld id="{86CB4B4D-7CA3-9044-876B-883B54F8677D}" type="slidenum"/>
+            <a:fld id="{86CB4B4D-7CA3-9044-876B-883B54F8677D}" type="slidenum">
+              <a:t>‹#›</a:t>
+            </a:fld>
+            <a:endParaRPr/>
           </a:p>
         </p:txBody>
       </p:sp>
@@ -646,12 +661,12 @@
   <p:clrMapOvr>
     <a:masterClrMapping/>
   </p:clrMapOvr>
-  <p:transition xmlns:p14="http://schemas.microsoft.com/office/powerpoint/2010/main" spd="med" advClick="1"/>
+  <p:transition spd="med"/>
 </p:sldLayout>
 </file>
 
 <file path=ppt/slideLayouts/slideLayout10.xml><?xml version="1.0" encoding="utf-8"?>
-<p:sldLayout xmlns:a="http://schemas.openxmlformats.org/drawingml/2006/main" xmlns:r="http://schemas.openxmlformats.org/officeDocument/2006/relationships" xmlns:p="http://schemas.openxmlformats.org/presentationml/2006/main" xmlns:m="http://schemas.openxmlformats.org/officeDocument/2006/math" xmlns:a14="http://schemas.microsoft.com/office/drawing/2010/main" type="tx" showMasterSp="1" showMasterPhAnim="1">
+<p:sldLayout xmlns:a="http://schemas.openxmlformats.org/drawingml/2006/main" xmlns:r="http://schemas.openxmlformats.org/officeDocument/2006/relationships" xmlns:p="http://schemas.openxmlformats.org/presentationml/2006/main" type="tx">
   <p:cSld name="Photo - 3 Up">
     <p:spTree>
       <p:nvGrpSpPr>
@@ -670,7 +685,9 @@
       <p:sp>
         <p:nvSpPr>
           <p:cNvPr id="93" name="Image"/>
-          <p:cNvSpPr/>
+          <p:cNvSpPr>
+            <a:spLocks noGrp="1"/>
+          </p:cNvSpPr>
           <p:nvPr>
             <p:ph type="pic" idx="21"/>
           </p:nvPr>
@@ -690,14 +707,16 @@
           </a:bodyPr>
           <a:lstStyle/>
           <a:p>
-            <a:pPr/>
+            <a:endParaRPr/>
           </a:p>
         </p:txBody>
       </p:sp>
       <p:sp>
         <p:nvSpPr>
           <p:cNvPr id="94" name="Image"/>
-          <p:cNvSpPr/>
+          <p:cNvSpPr>
+            <a:spLocks noGrp="1"/>
+          </p:cNvSpPr>
           <p:nvPr>
             <p:ph type="pic" sz="quarter" idx="22"/>
           </p:nvPr>
@@ -717,14 +736,16 @@
           </a:bodyPr>
           <a:lstStyle/>
           <a:p>
-            <a:pPr/>
+            <a:endParaRPr/>
           </a:p>
         </p:txBody>
       </p:sp>
       <p:sp>
         <p:nvSpPr>
           <p:cNvPr id="95" name="Image"/>
-          <p:cNvSpPr/>
+          <p:cNvSpPr>
+            <a:spLocks noGrp="1"/>
+          </p:cNvSpPr>
           <p:nvPr>
             <p:ph type="pic" sz="quarter" idx="23"/>
           </p:nvPr>
@@ -744,14 +765,16 @@
           </a:bodyPr>
           <a:lstStyle/>
           <a:p>
-            <a:pPr/>
+            <a:endParaRPr/>
           </a:p>
         </p:txBody>
       </p:sp>
       <p:sp>
         <p:nvSpPr>
           <p:cNvPr id="96" name="Slide Number"/>
-          <p:cNvSpPr txBox="1"/>
+          <p:cNvSpPr txBox="1">
+            <a:spLocks noGrp="1"/>
+          </p:cNvSpPr>
           <p:nvPr>
             <p:ph type="sldNum" sz="quarter" idx="2"/>
           </p:nvPr>
@@ -765,8 +788,10 @@
           <a:bodyPr/>
           <a:lstStyle/>
           <a:p>
-            <a:pPr/>
-            <a:fld id="{86CB4B4D-7CA3-9044-876B-883B54F8677D}" type="slidenum"/>
+            <a:fld id="{86CB4B4D-7CA3-9044-876B-883B54F8677D}" type="slidenum">
+              <a:t>‹#›</a:t>
+            </a:fld>
+            <a:endParaRPr/>
           </a:p>
         </p:txBody>
       </p:sp>
@@ -775,12 +800,12 @@
   <p:clrMapOvr>
     <a:masterClrMapping/>
   </p:clrMapOvr>
-  <p:transition xmlns:p14="http://schemas.microsoft.com/office/powerpoint/2010/main" spd="med" advClick="1"/>
+  <p:transition spd="med"/>
 </p:sldLayout>
 </file>
 
 <file path=ppt/slideLayouts/slideLayout11.xml><?xml version="1.0" encoding="utf-8"?>
-<p:sldLayout xmlns:a="http://schemas.openxmlformats.org/drawingml/2006/main" xmlns:r="http://schemas.openxmlformats.org/officeDocument/2006/relationships" xmlns:p="http://schemas.openxmlformats.org/presentationml/2006/main" xmlns:m="http://schemas.openxmlformats.org/officeDocument/2006/math" xmlns:a14="http://schemas.microsoft.com/office/drawing/2010/main" type="tx" showMasterSp="1" showMasterPhAnim="1">
+<p:sldLayout xmlns:a="http://schemas.openxmlformats.org/drawingml/2006/main" xmlns:r="http://schemas.openxmlformats.org/officeDocument/2006/relationships" xmlns:p="http://schemas.openxmlformats.org/presentationml/2006/main" type="tx">
   <p:cSld name="Quote">
     <p:spTree>
       <p:nvGrpSpPr>
@@ -799,7 +824,9 @@
       <p:sp>
         <p:nvSpPr>
           <p:cNvPr id="103" name="–Johnny Appleseed"/>
-          <p:cNvSpPr txBox="1"/>
+          <p:cNvSpPr txBox="1">
+            <a:spLocks noGrp="1"/>
+          </p:cNvSpPr>
           <p:nvPr>
             <p:ph type="body" sz="quarter" idx="21"/>
           </p:nvPr>
@@ -830,7 +857,6 @@
             </a:lvl1pPr>
           </a:lstStyle>
           <a:p>
-            <a:pPr/>
             <a:r>
               <a:t>–Johnny Appleseed</a:t>
             </a:r>
@@ -840,7 +866,9 @@
       <p:sp>
         <p:nvSpPr>
           <p:cNvPr id="104" name="“Type a quote here.”"/>
-          <p:cNvSpPr txBox="1"/>
+          <p:cNvSpPr txBox="1">
+            <a:spLocks noGrp="1"/>
+          </p:cNvSpPr>
           <p:nvPr>
             <p:ph type="body" sz="quarter" idx="22"/>
           </p:nvPr>
@@ -866,7 +894,6 @@
             </a:lvl1pPr>
           </a:lstStyle>
           <a:p>
-            <a:pPr/>
             <a:r>
               <a:t>“Type a quote here.” </a:t>
             </a:r>
@@ -876,7 +903,9 @@
       <p:sp>
         <p:nvSpPr>
           <p:cNvPr id="105" name="Slide Number"/>
-          <p:cNvSpPr txBox="1"/>
+          <p:cNvSpPr txBox="1">
+            <a:spLocks noGrp="1"/>
+          </p:cNvSpPr>
           <p:nvPr>
             <p:ph type="sldNum" sz="quarter" idx="2"/>
           </p:nvPr>
@@ -890,8 +919,10 @@
           <a:bodyPr/>
           <a:lstStyle/>
           <a:p>
-            <a:pPr/>
-            <a:fld id="{86CB4B4D-7CA3-9044-876B-883B54F8677D}" type="slidenum"/>
+            <a:fld id="{86CB4B4D-7CA3-9044-876B-883B54F8677D}" type="slidenum">
+              <a:t>‹#›</a:t>
+            </a:fld>
+            <a:endParaRPr/>
           </a:p>
         </p:txBody>
       </p:sp>
@@ -900,12 +931,12 @@
   <p:clrMapOvr>
     <a:masterClrMapping/>
   </p:clrMapOvr>
-  <p:transition xmlns:p14="http://schemas.microsoft.com/office/powerpoint/2010/main" spd="med" advClick="1"/>
+  <p:transition spd="med"/>
 </p:sldLayout>
 </file>
 
 <file path=ppt/slideLayouts/slideLayout12.xml><?xml version="1.0" encoding="utf-8"?>
-<p:sldLayout xmlns:a="http://schemas.openxmlformats.org/drawingml/2006/main" xmlns:r="http://schemas.openxmlformats.org/officeDocument/2006/relationships" xmlns:p="http://schemas.openxmlformats.org/presentationml/2006/main" xmlns:m="http://schemas.openxmlformats.org/officeDocument/2006/math" xmlns:a14="http://schemas.microsoft.com/office/drawing/2010/main" type="tx" showMasterSp="1" showMasterPhAnim="1">
+<p:sldLayout xmlns:a="http://schemas.openxmlformats.org/drawingml/2006/main" xmlns:r="http://schemas.openxmlformats.org/officeDocument/2006/relationships" xmlns:p="http://schemas.openxmlformats.org/presentationml/2006/main" type="tx">
   <p:cSld name="Photo">
     <p:spTree>
       <p:nvGrpSpPr>
@@ -924,7 +955,9 @@
       <p:sp>
         <p:nvSpPr>
           <p:cNvPr id="112" name="Image"/>
-          <p:cNvSpPr/>
+          <p:cNvSpPr>
+            <a:spLocks noGrp="1"/>
+          </p:cNvSpPr>
           <p:nvPr>
             <p:ph type="pic" idx="21"/>
           </p:nvPr>
@@ -944,14 +977,16 @@
           </a:bodyPr>
           <a:lstStyle/>
           <a:p>
-            <a:pPr/>
+            <a:endParaRPr/>
           </a:p>
         </p:txBody>
       </p:sp>
       <p:sp>
         <p:nvSpPr>
           <p:cNvPr id="113" name="Slide Number"/>
-          <p:cNvSpPr txBox="1"/>
+          <p:cNvSpPr txBox="1">
+            <a:spLocks noGrp="1"/>
+          </p:cNvSpPr>
           <p:nvPr>
             <p:ph type="sldNum" sz="quarter" idx="2"/>
           </p:nvPr>
@@ -965,8 +1000,10 @@
           <a:bodyPr/>
           <a:lstStyle/>
           <a:p>
-            <a:pPr/>
-            <a:fld id="{86CB4B4D-7CA3-9044-876B-883B54F8677D}" type="slidenum"/>
+            <a:fld id="{86CB4B4D-7CA3-9044-876B-883B54F8677D}" type="slidenum">
+              <a:t>‹#›</a:t>
+            </a:fld>
+            <a:endParaRPr/>
           </a:p>
         </p:txBody>
       </p:sp>
@@ -975,12 +1012,12 @@
   <p:clrMapOvr>
     <a:masterClrMapping/>
   </p:clrMapOvr>
-  <p:transition xmlns:p14="http://schemas.microsoft.com/office/powerpoint/2010/main" spd="med" advClick="1"/>
+  <p:transition spd="med"/>
 </p:sldLayout>
 </file>
 
 <file path=ppt/slideLayouts/slideLayout13.xml><?xml version="1.0" encoding="utf-8"?>
-<p:sldLayout xmlns:a="http://schemas.openxmlformats.org/drawingml/2006/main" xmlns:r="http://schemas.openxmlformats.org/officeDocument/2006/relationships" xmlns:p="http://schemas.openxmlformats.org/presentationml/2006/main" xmlns:m="http://schemas.openxmlformats.org/officeDocument/2006/math" xmlns:a14="http://schemas.microsoft.com/office/drawing/2010/main" type="tx" showMasterSp="1" showMasterPhAnim="1">
+<p:sldLayout xmlns:a="http://schemas.openxmlformats.org/drawingml/2006/main" xmlns:r="http://schemas.openxmlformats.org/officeDocument/2006/relationships" xmlns:p="http://schemas.openxmlformats.org/presentationml/2006/main" type="tx">
   <p:cSld name="Blank">
     <p:spTree>
       <p:nvGrpSpPr>
@@ -999,7 +1036,9 @@
       <p:sp>
         <p:nvSpPr>
           <p:cNvPr id="120" name="Slide Number"/>
-          <p:cNvSpPr txBox="1"/>
+          <p:cNvSpPr txBox="1">
+            <a:spLocks noGrp="1"/>
+          </p:cNvSpPr>
           <p:nvPr>
             <p:ph type="sldNum" sz="quarter" idx="2"/>
           </p:nvPr>
@@ -1013,8 +1052,10 @@
           <a:bodyPr/>
           <a:lstStyle/>
           <a:p>
-            <a:pPr/>
-            <a:fld id="{86CB4B4D-7CA3-9044-876B-883B54F8677D}" type="slidenum"/>
+            <a:fld id="{86CB4B4D-7CA3-9044-876B-883B54F8677D}" type="slidenum">
+              <a:t>‹#›</a:t>
+            </a:fld>
+            <a:endParaRPr/>
           </a:p>
         </p:txBody>
       </p:sp>
@@ -1023,12 +1064,12 @@
   <p:clrMapOvr>
     <a:masterClrMapping/>
   </p:clrMapOvr>
-  <p:transition xmlns:p14="http://schemas.microsoft.com/office/powerpoint/2010/main" spd="med" advClick="1"/>
+  <p:transition spd="med"/>
 </p:sldLayout>
 </file>
 
 <file path=ppt/slideLayouts/slideLayout14.xml><?xml version="1.0" encoding="utf-8"?>
-<p:sldLayout xmlns:a="http://schemas.openxmlformats.org/drawingml/2006/main" xmlns:r="http://schemas.openxmlformats.org/officeDocument/2006/relationships" xmlns:p="http://schemas.openxmlformats.org/presentationml/2006/main" xmlns:m="http://schemas.openxmlformats.org/officeDocument/2006/math" xmlns:a14="http://schemas.microsoft.com/office/drawing/2010/main" type="tx" showMasterSp="1" showMasterPhAnim="1">
+<p:sldLayout xmlns:a="http://schemas.openxmlformats.org/drawingml/2006/main" xmlns:r="http://schemas.openxmlformats.org/officeDocument/2006/relationships" xmlns:p="http://schemas.openxmlformats.org/presentationml/2006/main" type="tx">
   <p:cSld name="Bullets">
     <p:spTree>
       <p:nvGrpSpPr>
@@ -1047,7 +1088,9 @@
       <p:sp>
         <p:nvSpPr>
           <p:cNvPr id="127" name="Body Level One…"/>
-          <p:cNvSpPr txBox="1"/>
+          <p:cNvSpPr txBox="1">
+            <a:spLocks noGrp="1"/>
+          </p:cNvSpPr>
           <p:nvPr>
             <p:ph type="body" sz="half" idx="1"/>
           </p:nvPr>
@@ -1065,7 +1108,6 @@
           <a:bodyPr/>
           <a:lstStyle/>
           <a:p>
-            <a:pPr/>
             <a:r>
               <a:t>Body Level One</a:t>
             </a:r>
@@ -1099,7 +1141,9 @@
       <p:sp>
         <p:nvSpPr>
           <p:cNvPr id="128" name="Slide Number"/>
-          <p:cNvSpPr txBox="1"/>
+          <p:cNvSpPr txBox="1">
+            <a:spLocks noGrp="1"/>
+          </p:cNvSpPr>
           <p:nvPr>
             <p:ph type="sldNum" sz="quarter" idx="2"/>
           </p:nvPr>
@@ -1113,8 +1157,10 @@
           <a:bodyPr/>
           <a:lstStyle/>
           <a:p>
-            <a:pPr/>
-            <a:fld id="{86CB4B4D-7CA3-9044-876B-883B54F8677D}" type="slidenum"/>
+            <a:fld id="{86CB4B4D-7CA3-9044-876B-883B54F8677D}" type="slidenum">
+              <a:t>‹#›</a:t>
+            </a:fld>
+            <a:endParaRPr/>
           </a:p>
         </p:txBody>
       </p:sp>
@@ -1123,12 +1169,12 @@
   <p:clrMapOvr>
     <a:masterClrMapping/>
   </p:clrMapOvr>
-  <p:transition xmlns:p14="http://schemas.microsoft.com/office/powerpoint/2010/main" spd="med" advClick="1"/>
+  <p:transition spd="med"/>
 </p:sldLayout>
 </file>
 
 <file path=ppt/slideLayouts/slideLayout2.xml><?xml version="1.0" encoding="utf-8"?>
-<p:sldLayout xmlns:a="http://schemas.openxmlformats.org/drawingml/2006/main" xmlns:r="http://schemas.openxmlformats.org/officeDocument/2006/relationships" xmlns:p="http://schemas.openxmlformats.org/presentationml/2006/main" xmlns:m="http://schemas.openxmlformats.org/officeDocument/2006/math" xmlns:a14="http://schemas.microsoft.com/office/drawing/2010/main" type="tx" showMasterSp="1" showMasterPhAnim="1">
+<p:sldLayout xmlns:a="http://schemas.openxmlformats.org/drawingml/2006/main" xmlns:r="http://schemas.openxmlformats.org/officeDocument/2006/relationships" xmlns:p="http://schemas.openxmlformats.org/presentationml/2006/main" type="tx">
   <p:cSld name="Title - Top">
     <p:spTree>
       <p:nvGrpSpPr>
@@ -1147,7 +1193,9 @@
       <p:sp>
         <p:nvSpPr>
           <p:cNvPr id="20" name="Title Text"/>
-          <p:cNvSpPr txBox="1"/>
+          <p:cNvSpPr txBox="1">
+            <a:spLocks noGrp="1"/>
+          </p:cNvSpPr>
           <p:nvPr>
             <p:ph type="title"/>
           </p:nvPr>
@@ -1161,7 +1209,6 @@
           <a:bodyPr/>
           <a:lstStyle/>
           <a:p>
-            <a:pPr/>
             <a:r>
               <a:t>Title Text</a:t>
             </a:r>
@@ -1171,7 +1218,9 @@
       <p:sp>
         <p:nvSpPr>
           <p:cNvPr id="21" name="Slide Number"/>
-          <p:cNvSpPr txBox="1"/>
+          <p:cNvSpPr txBox="1">
+            <a:spLocks noGrp="1"/>
+          </p:cNvSpPr>
           <p:nvPr>
             <p:ph type="sldNum" sz="quarter" idx="2"/>
           </p:nvPr>
@@ -1185,8 +1234,10 @@
           <a:bodyPr/>
           <a:lstStyle/>
           <a:p>
-            <a:pPr/>
-            <a:fld id="{86CB4B4D-7CA3-9044-876B-883B54F8677D}" type="slidenum"/>
+            <a:fld id="{86CB4B4D-7CA3-9044-876B-883B54F8677D}" type="slidenum">
+              <a:t>‹#›</a:t>
+            </a:fld>
+            <a:endParaRPr/>
           </a:p>
         </p:txBody>
       </p:sp>
@@ -1195,12 +1246,12 @@
   <p:clrMapOvr>
     <a:masterClrMapping/>
   </p:clrMapOvr>
-  <p:transition xmlns:p14="http://schemas.microsoft.com/office/powerpoint/2010/main" spd="med" advClick="1"/>
+  <p:transition spd="med"/>
 </p:sldLayout>
 </file>
 
 <file path=ppt/slideLayouts/slideLayout3.xml><?xml version="1.0" encoding="utf-8"?>
-<p:sldLayout xmlns:a="http://schemas.openxmlformats.org/drawingml/2006/main" xmlns:r="http://schemas.openxmlformats.org/officeDocument/2006/relationships" xmlns:p="http://schemas.openxmlformats.org/presentationml/2006/main" xmlns:m="http://schemas.openxmlformats.org/officeDocument/2006/math" xmlns:a14="http://schemas.microsoft.com/office/drawing/2010/main" type="tx" showMasterSp="1" showMasterPhAnim="1">
+<p:sldLayout xmlns:a="http://schemas.openxmlformats.org/drawingml/2006/main" xmlns:r="http://schemas.openxmlformats.org/officeDocument/2006/relationships" xmlns:p="http://schemas.openxmlformats.org/presentationml/2006/main" type="tx">
   <p:cSld name="Title - Center">
     <p:spTree>
       <p:nvGrpSpPr>
@@ -1219,7 +1270,9 @@
       <p:sp>
         <p:nvSpPr>
           <p:cNvPr id="28" name="Title Text"/>
-          <p:cNvSpPr txBox="1"/>
+          <p:cNvSpPr txBox="1">
+            <a:spLocks noGrp="1"/>
+          </p:cNvSpPr>
           <p:nvPr>
             <p:ph type="title"/>
           </p:nvPr>
@@ -1237,7 +1290,6 @@
           <a:bodyPr/>
           <a:lstStyle/>
           <a:p>
-            <a:pPr/>
             <a:r>
               <a:t>Title Text</a:t>
             </a:r>
@@ -1247,7 +1299,9 @@
       <p:sp>
         <p:nvSpPr>
           <p:cNvPr id="29" name="Slide Number"/>
-          <p:cNvSpPr txBox="1"/>
+          <p:cNvSpPr txBox="1">
+            <a:spLocks noGrp="1"/>
+          </p:cNvSpPr>
           <p:nvPr>
             <p:ph type="sldNum" sz="quarter" idx="2"/>
           </p:nvPr>
@@ -1261,8 +1315,10 @@
           <a:bodyPr/>
           <a:lstStyle/>
           <a:p>
-            <a:pPr/>
-            <a:fld id="{86CB4B4D-7CA3-9044-876B-883B54F8677D}" type="slidenum"/>
+            <a:fld id="{86CB4B4D-7CA3-9044-876B-883B54F8677D}" type="slidenum">
+              <a:t>‹#›</a:t>
+            </a:fld>
+            <a:endParaRPr/>
           </a:p>
         </p:txBody>
       </p:sp>
@@ -1271,12 +1327,12 @@
   <p:clrMapOvr>
     <a:masterClrMapping/>
   </p:clrMapOvr>
-  <p:transition xmlns:p14="http://schemas.microsoft.com/office/powerpoint/2010/main" spd="med" advClick="1"/>
+  <p:transition spd="med"/>
 </p:sldLayout>
 </file>
 
 <file path=ppt/slideLayouts/slideLayout4.xml><?xml version="1.0" encoding="utf-8"?>
-<p:sldLayout xmlns:a="http://schemas.openxmlformats.org/drawingml/2006/main" xmlns:r="http://schemas.openxmlformats.org/officeDocument/2006/relationships" xmlns:p="http://schemas.openxmlformats.org/presentationml/2006/main" xmlns:m="http://schemas.openxmlformats.org/officeDocument/2006/math" xmlns:a14="http://schemas.microsoft.com/office/drawing/2010/main" type="tx" showMasterSp="1" showMasterPhAnim="1">
+<p:sldLayout xmlns:a="http://schemas.openxmlformats.org/drawingml/2006/main" xmlns:r="http://schemas.openxmlformats.org/officeDocument/2006/relationships" xmlns:p="http://schemas.openxmlformats.org/presentationml/2006/main" type="tx">
   <p:cSld name="Title &amp; Bullets">
     <p:spTree>
       <p:nvGrpSpPr>
@@ -1295,7 +1351,9 @@
       <p:sp>
         <p:nvSpPr>
           <p:cNvPr id="36" name="Title Text"/>
-          <p:cNvSpPr txBox="1"/>
+          <p:cNvSpPr txBox="1">
+            <a:spLocks noGrp="1"/>
+          </p:cNvSpPr>
           <p:nvPr>
             <p:ph type="title"/>
           </p:nvPr>
@@ -1309,7 +1367,6 @@
           <a:bodyPr/>
           <a:lstStyle/>
           <a:p>
-            <a:pPr/>
             <a:r>
               <a:t>Title Text</a:t>
             </a:r>
@@ -1319,7 +1376,9 @@
       <p:sp>
         <p:nvSpPr>
           <p:cNvPr id="37" name="Body Level One…"/>
-          <p:cNvSpPr txBox="1"/>
+          <p:cNvSpPr txBox="1">
+            <a:spLocks noGrp="1"/>
+          </p:cNvSpPr>
           <p:nvPr>
             <p:ph type="body" idx="1"/>
           </p:nvPr>
@@ -1333,7 +1392,6 @@
           <a:bodyPr/>
           <a:lstStyle/>
           <a:p>
-            <a:pPr/>
             <a:r>
               <a:t>Body Level One</a:t>
             </a:r>
@@ -1367,7 +1425,9 @@
       <p:sp>
         <p:nvSpPr>
           <p:cNvPr id="38" name="Slide Number"/>
-          <p:cNvSpPr txBox="1"/>
+          <p:cNvSpPr txBox="1">
+            <a:spLocks noGrp="1"/>
+          </p:cNvSpPr>
           <p:nvPr>
             <p:ph type="sldNum" sz="quarter" idx="2"/>
           </p:nvPr>
@@ -1381,8 +1441,10 @@
           <a:bodyPr/>
           <a:lstStyle/>
           <a:p>
-            <a:pPr/>
-            <a:fld id="{86CB4B4D-7CA3-9044-876B-883B54F8677D}" type="slidenum"/>
+            <a:fld id="{86CB4B4D-7CA3-9044-876B-883B54F8677D}" type="slidenum">
+              <a:t>‹#›</a:t>
+            </a:fld>
+            <a:endParaRPr/>
           </a:p>
         </p:txBody>
       </p:sp>
@@ -1391,12 +1453,12 @@
   <p:clrMapOvr>
     <a:masterClrMapping/>
   </p:clrMapOvr>
-  <p:transition xmlns:p14="http://schemas.microsoft.com/office/powerpoint/2010/main" spd="med" advClick="1"/>
+  <p:transition spd="med"/>
 </p:sldLayout>
 </file>
 
 <file path=ppt/slideLayouts/slideLayout5.xml><?xml version="1.0" encoding="utf-8"?>
-<p:sldLayout xmlns:a="http://schemas.openxmlformats.org/drawingml/2006/main" xmlns:r="http://schemas.openxmlformats.org/officeDocument/2006/relationships" xmlns:p="http://schemas.openxmlformats.org/presentationml/2006/main" xmlns:m="http://schemas.openxmlformats.org/officeDocument/2006/math" xmlns:a14="http://schemas.microsoft.com/office/drawing/2010/main" type="tx" showMasterSp="1" showMasterPhAnim="1">
+<p:sldLayout xmlns:a="http://schemas.openxmlformats.org/drawingml/2006/main" xmlns:r="http://schemas.openxmlformats.org/officeDocument/2006/relationships" xmlns:p="http://schemas.openxmlformats.org/presentationml/2006/main" type="tx">
   <p:cSld name="Title &amp; Bullets - Left">
     <p:spTree>
       <p:nvGrpSpPr>
@@ -1440,13 +1502,16 @@
             <a:pPr algn="l" defTabSz="642937">
               <a:defRPr sz="1600"/>
             </a:pPr>
+            <a:endParaRPr/>
           </a:p>
         </p:txBody>
       </p:sp>
       <p:sp>
         <p:nvSpPr>
           <p:cNvPr id="46" name="Title Text"/>
-          <p:cNvSpPr txBox="1"/>
+          <p:cNvSpPr txBox="1">
+            <a:spLocks noGrp="1"/>
+          </p:cNvSpPr>
           <p:nvPr>
             <p:ph type="title"/>
           </p:nvPr>
@@ -1466,7 +1531,6 @@
           </a:bodyPr>
           <a:lstStyle/>
           <a:p>
-            <a:pPr/>
             <a:r>
               <a:t>Title Text</a:t>
             </a:r>
@@ -1476,7 +1540,9 @@
       <p:sp>
         <p:nvSpPr>
           <p:cNvPr id="47" name="Body Level One…"/>
-          <p:cNvSpPr txBox="1"/>
+          <p:cNvSpPr txBox="1">
+            <a:spLocks noGrp="1"/>
+          </p:cNvSpPr>
           <p:nvPr>
             <p:ph type="body" sz="half" idx="1"/>
           </p:nvPr>
@@ -1557,7 +1623,6 @@
             </a:lvl5pPr>
           </a:lstStyle>
           <a:p>
-            <a:pPr/>
             <a:r>
               <a:t>Body Level One</a:t>
             </a:r>
@@ -1591,7 +1656,9 @@
       <p:sp>
         <p:nvSpPr>
           <p:cNvPr id="48" name="Slide Number"/>
-          <p:cNvSpPr txBox="1"/>
+          <p:cNvSpPr txBox="1">
+            <a:spLocks noGrp="1"/>
+          </p:cNvSpPr>
           <p:nvPr>
             <p:ph type="sldNum" sz="quarter" idx="2"/>
           </p:nvPr>
@@ -1620,8 +1687,10 @@
             </a:lvl1pPr>
           </a:lstStyle>
           <a:p>
-            <a:pPr/>
-            <a:fld id="{86CB4B4D-7CA3-9044-876B-883B54F8677D}" type="slidenum"/>
+            <a:fld id="{86CB4B4D-7CA3-9044-876B-883B54F8677D}" type="slidenum">
+              <a:t>‹#›</a:t>
+            </a:fld>
+            <a:endParaRPr/>
           </a:p>
         </p:txBody>
       </p:sp>
@@ -1630,12 +1699,12 @@
   <p:clrMapOvr>
     <a:masterClrMapping/>
   </p:clrMapOvr>
-  <p:transition xmlns:p14="http://schemas.microsoft.com/office/powerpoint/2010/main" spd="med" advClick="1"/>
+  <p:transition spd="med"/>
 </p:sldLayout>
 </file>
 
 <file path=ppt/slideLayouts/slideLayout6.xml><?xml version="1.0" encoding="utf-8"?>
-<p:sldLayout xmlns:a="http://schemas.openxmlformats.org/drawingml/2006/main" xmlns:r="http://schemas.openxmlformats.org/officeDocument/2006/relationships" xmlns:p="http://schemas.openxmlformats.org/presentationml/2006/main" xmlns:m="http://schemas.openxmlformats.org/officeDocument/2006/math" xmlns:a14="http://schemas.microsoft.com/office/drawing/2010/main" type="tx" showMasterSp="1" showMasterPhAnim="1">
+<p:sldLayout xmlns:a="http://schemas.openxmlformats.org/drawingml/2006/main" xmlns:r="http://schemas.openxmlformats.org/officeDocument/2006/relationships" xmlns:p="http://schemas.openxmlformats.org/presentationml/2006/main" type="tx">
   <p:cSld name="Photo - Horizontal">
     <p:spTree>
       <p:nvGrpSpPr>
@@ -1654,7 +1723,9 @@
       <p:sp>
         <p:nvSpPr>
           <p:cNvPr id="55" name="Image"/>
-          <p:cNvSpPr/>
+          <p:cNvSpPr>
+            <a:spLocks noGrp="1"/>
+          </p:cNvSpPr>
           <p:nvPr>
             <p:ph type="pic" sz="half" idx="21"/>
           </p:nvPr>
@@ -1674,14 +1745,16 @@
           </a:bodyPr>
           <a:lstStyle/>
           <a:p>
-            <a:pPr/>
+            <a:endParaRPr/>
           </a:p>
         </p:txBody>
       </p:sp>
       <p:sp>
         <p:nvSpPr>
           <p:cNvPr id="56" name="Title Text"/>
-          <p:cNvSpPr txBox="1"/>
+          <p:cNvSpPr txBox="1">
+            <a:spLocks noGrp="1"/>
+          </p:cNvSpPr>
           <p:nvPr>
             <p:ph type="title"/>
           </p:nvPr>
@@ -1699,7 +1772,6 @@
           <a:bodyPr anchor="b"/>
           <a:lstStyle/>
           <a:p>
-            <a:pPr/>
             <a:r>
               <a:t>Title Text</a:t>
             </a:r>
@@ -1709,7 +1781,9 @@
       <p:sp>
         <p:nvSpPr>
           <p:cNvPr id="57" name="Body Level One…"/>
-          <p:cNvSpPr txBox="1"/>
+          <p:cNvSpPr txBox="1">
+            <a:spLocks noGrp="1"/>
+          </p:cNvSpPr>
           <p:nvPr>
             <p:ph type="body" sz="quarter" idx="1"/>
           </p:nvPr>
@@ -1753,7 +1827,6 @@
             </a:lvl5pPr>
           </a:lstStyle>
           <a:p>
-            <a:pPr/>
             <a:r>
               <a:t>Body Level One</a:t>
             </a:r>
@@ -1787,7 +1860,9 @@
       <p:sp>
         <p:nvSpPr>
           <p:cNvPr id="58" name="Slide Number"/>
-          <p:cNvSpPr txBox="1"/>
+          <p:cNvSpPr txBox="1">
+            <a:spLocks noGrp="1"/>
+          </p:cNvSpPr>
           <p:nvPr>
             <p:ph type="sldNum" sz="quarter" idx="2"/>
           </p:nvPr>
@@ -1805,8 +1880,10 @@
           <a:bodyPr/>
           <a:lstStyle/>
           <a:p>
-            <a:pPr/>
-            <a:fld id="{86CB4B4D-7CA3-9044-876B-883B54F8677D}" type="slidenum"/>
+            <a:fld id="{86CB4B4D-7CA3-9044-876B-883B54F8677D}" type="slidenum">
+              <a:t>‹#›</a:t>
+            </a:fld>
+            <a:endParaRPr/>
           </a:p>
         </p:txBody>
       </p:sp>
@@ -1815,12 +1892,12 @@
   <p:clrMapOvr>
     <a:masterClrMapping/>
   </p:clrMapOvr>
-  <p:transition xmlns:p14="http://schemas.microsoft.com/office/powerpoint/2010/main" spd="med" advClick="1"/>
+  <p:transition spd="med"/>
 </p:sldLayout>
 </file>
 
 <file path=ppt/slideLayouts/slideLayout7.xml><?xml version="1.0" encoding="utf-8"?>
-<p:sldLayout xmlns:a="http://schemas.openxmlformats.org/drawingml/2006/main" xmlns:r="http://schemas.openxmlformats.org/officeDocument/2006/relationships" xmlns:p="http://schemas.openxmlformats.org/presentationml/2006/main" xmlns:m="http://schemas.openxmlformats.org/officeDocument/2006/math" xmlns:a14="http://schemas.microsoft.com/office/drawing/2010/main" type="tx" showMasterSp="1" showMasterPhAnim="1">
+<p:sldLayout xmlns:a="http://schemas.openxmlformats.org/drawingml/2006/main" xmlns:r="http://schemas.openxmlformats.org/officeDocument/2006/relationships" xmlns:p="http://schemas.openxmlformats.org/presentationml/2006/main" type="tx">
   <p:cSld name="Photo - Vertical">
     <p:spTree>
       <p:nvGrpSpPr>
@@ -1839,7 +1916,9 @@
       <p:sp>
         <p:nvSpPr>
           <p:cNvPr id="65" name="Image"/>
-          <p:cNvSpPr/>
+          <p:cNvSpPr>
+            <a:spLocks noGrp="1"/>
+          </p:cNvSpPr>
           <p:nvPr>
             <p:ph type="pic" idx="21"/>
           </p:nvPr>
@@ -1859,14 +1938,16 @@
           </a:bodyPr>
           <a:lstStyle/>
           <a:p>
-            <a:pPr/>
+            <a:endParaRPr/>
           </a:p>
         </p:txBody>
       </p:sp>
       <p:sp>
         <p:nvSpPr>
           <p:cNvPr id="66" name="Title Text"/>
-          <p:cNvSpPr txBox="1"/>
+          <p:cNvSpPr txBox="1">
+            <a:spLocks noGrp="1"/>
+          </p:cNvSpPr>
           <p:nvPr>
             <p:ph type="title"/>
           </p:nvPr>
@@ -1884,7 +1965,7 @@
           <a:bodyPr anchor="b"/>
           <a:lstStyle>
             <a:lvl1pPr>
-              <a:defRPr b="0" sz="8400">
+              <a:defRPr sz="8400" b="0">
                 <a:latin typeface="+mn-lt"/>
                 <a:ea typeface="+mn-ea"/>
                 <a:cs typeface="+mn-cs"/>
@@ -1893,7 +1974,6 @@
             </a:lvl1pPr>
           </a:lstStyle>
           <a:p>
-            <a:pPr/>
             <a:r>
               <a:t>Title Text</a:t>
             </a:r>
@@ -1903,7 +1983,9 @@
       <p:sp>
         <p:nvSpPr>
           <p:cNvPr id="67" name="Body Level One…"/>
-          <p:cNvSpPr txBox="1"/>
+          <p:cNvSpPr txBox="1">
+            <a:spLocks noGrp="1"/>
+          </p:cNvSpPr>
           <p:nvPr>
             <p:ph type="body" sz="quarter" idx="1"/>
           </p:nvPr>
@@ -1947,7 +2029,6 @@
             </a:lvl5pPr>
           </a:lstStyle>
           <a:p>
-            <a:pPr/>
             <a:r>
               <a:t>Body Level One</a:t>
             </a:r>
@@ -1981,7 +2062,9 @@
       <p:sp>
         <p:nvSpPr>
           <p:cNvPr id="68" name="Slide Number"/>
-          <p:cNvSpPr txBox="1"/>
+          <p:cNvSpPr txBox="1">
+            <a:spLocks noGrp="1"/>
+          </p:cNvSpPr>
           <p:nvPr>
             <p:ph type="sldNum" sz="quarter" idx="2"/>
           </p:nvPr>
@@ -1995,8 +2078,10 @@
           <a:bodyPr/>
           <a:lstStyle/>
           <a:p>
-            <a:pPr/>
-            <a:fld id="{86CB4B4D-7CA3-9044-876B-883B54F8677D}" type="slidenum"/>
+            <a:fld id="{86CB4B4D-7CA3-9044-876B-883B54F8677D}" type="slidenum">
+              <a:t>‹#›</a:t>
+            </a:fld>
+            <a:endParaRPr/>
           </a:p>
         </p:txBody>
       </p:sp>
@@ -2005,12 +2090,12 @@
   <p:clrMapOvr>
     <a:masterClrMapping/>
   </p:clrMapOvr>
-  <p:transition xmlns:p14="http://schemas.microsoft.com/office/powerpoint/2010/main" spd="med" advClick="1"/>
+  <p:transition spd="med"/>
 </p:sldLayout>
 </file>
 
 <file path=ppt/slideLayouts/slideLayout8.xml><?xml version="1.0" encoding="utf-8"?>
-<p:sldLayout xmlns:a="http://schemas.openxmlformats.org/drawingml/2006/main" xmlns:r="http://schemas.openxmlformats.org/officeDocument/2006/relationships" xmlns:p="http://schemas.openxmlformats.org/presentationml/2006/main" xmlns:m="http://schemas.openxmlformats.org/officeDocument/2006/math" xmlns:a14="http://schemas.microsoft.com/office/drawing/2010/main" type="tx" showMasterSp="1" showMasterPhAnim="1">
+<p:sldLayout xmlns:a="http://schemas.openxmlformats.org/drawingml/2006/main" xmlns:r="http://schemas.openxmlformats.org/officeDocument/2006/relationships" xmlns:p="http://schemas.openxmlformats.org/presentationml/2006/main" type="tx">
   <p:cSld name="Title, Bullets &amp; Photo">
     <p:spTree>
       <p:nvGrpSpPr>
@@ -2029,7 +2114,9 @@
       <p:sp>
         <p:nvSpPr>
           <p:cNvPr id="75" name="Image"/>
-          <p:cNvSpPr/>
+          <p:cNvSpPr>
+            <a:spLocks noGrp="1"/>
+          </p:cNvSpPr>
           <p:nvPr>
             <p:ph type="pic" sz="half" idx="21"/>
           </p:nvPr>
@@ -2049,14 +2136,16 @@
           </a:bodyPr>
           <a:lstStyle/>
           <a:p>
-            <a:pPr/>
+            <a:endParaRPr/>
           </a:p>
         </p:txBody>
       </p:sp>
       <p:sp>
         <p:nvSpPr>
           <p:cNvPr id="76" name="Title Text"/>
-          <p:cNvSpPr txBox="1"/>
+          <p:cNvSpPr txBox="1">
+            <a:spLocks noGrp="1"/>
+          </p:cNvSpPr>
           <p:nvPr>
             <p:ph type="title"/>
           </p:nvPr>
@@ -2070,7 +2159,6 @@
           <a:bodyPr/>
           <a:lstStyle/>
           <a:p>
-            <a:pPr/>
             <a:r>
               <a:t>Title Text</a:t>
             </a:r>
@@ -2080,7 +2168,9 @@
       <p:sp>
         <p:nvSpPr>
           <p:cNvPr id="77" name="Body Level One…"/>
-          <p:cNvSpPr txBox="1"/>
+          <p:cNvSpPr txBox="1">
+            <a:spLocks noGrp="1"/>
+          </p:cNvSpPr>
           <p:nvPr>
             <p:ph type="body" sz="quarter" idx="1"/>
           </p:nvPr>
@@ -2129,7 +2219,6 @@
             </a:lvl5pPr>
           </a:lstStyle>
           <a:p>
-            <a:pPr/>
             <a:r>
               <a:t>Body Level One</a:t>
             </a:r>
@@ -2163,7 +2252,9 @@
       <p:sp>
         <p:nvSpPr>
           <p:cNvPr id="78" name="Slide Number"/>
-          <p:cNvSpPr txBox="1"/>
+          <p:cNvSpPr txBox="1">
+            <a:spLocks noGrp="1"/>
+          </p:cNvSpPr>
           <p:nvPr>
             <p:ph type="sldNum" sz="quarter" idx="2"/>
           </p:nvPr>
@@ -2177,8 +2268,10 @@
           <a:bodyPr/>
           <a:lstStyle/>
           <a:p>
-            <a:pPr/>
-            <a:fld id="{86CB4B4D-7CA3-9044-876B-883B54F8677D}" type="slidenum"/>
+            <a:fld id="{86CB4B4D-7CA3-9044-876B-883B54F8677D}" type="slidenum">
+              <a:t>‹#›</a:t>
+            </a:fld>
+            <a:endParaRPr/>
           </a:p>
         </p:txBody>
       </p:sp>
@@ -2187,12 +2280,12 @@
   <p:clrMapOvr>
     <a:masterClrMapping/>
   </p:clrMapOvr>
-  <p:transition xmlns:p14="http://schemas.microsoft.com/office/powerpoint/2010/main" spd="med" advClick="1"/>
+  <p:transition spd="med"/>
 </p:sldLayout>
 </file>
 
 <file path=ppt/slideLayouts/slideLayout9.xml><?xml version="1.0" encoding="utf-8"?>
-<p:sldLayout xmlns:a="http://schemas.openxmlformats.org/drawingml/2006/main" xmlns:r="http://schemas.openxmlformats.org/officeDocument/2006/relationships" xmlns:p="http://schemas.openxmlformats.org/presentationml/2006/main" xmlns:m="http://schemas.openxmlformats.org/officeDocument/2006/math" xmlns:a14="http://schemas.microsoft.com/office/drawing/2010/main" type="tx" showMasterSp="1" showMasterPhAnim="1">
+<p:sldLayout xmlns:a="http://schemas.openxmlformats.org/drawingml/2006/main" xmlns:r="http://schemas.openxmlformats.org/officeDocument/2006/relationships" xmlns:p="http://schemas.openxmlformats.org/presentationml/2006/main" type="tx">
   <p:cSld name="Bullets">
     <p:spTree>
       <p:nvGrpSpPr>
@@ -2211,7 +2304,9 @@
       <p:sp>
         <p:nvSpPr>
           <p:cNvPr id="85" name="Body Level One…"/>
-          <p:cNvSpPr txBox="1"/>
+          <p:cNvSpPr txBox="1">
+            <a:spLocks noGrp="1"/>
+          </p:cNvSpPr>
           <p:nvPr>
             <p:ph type="body" idx="1"/>
           </p:nvPr>
@@ -2229,7 +2324,6 @@
           <a:bodyPr/>
           <a:lstStyle/>
           <a:p>
-            <a:pPr/>
             <a:r>
               <a:t>Body Level One</a:t>
             </a:r>
@@ -2263,7 +2357,9 @@
       <p:sp>
         <p:nvSpPr>
           <p:cNvPr id="86" name="Slide Number"/>
-          <p:cNvSpPr txBox="1"/>
+          <p:cNvSpPr txBox="1">
+            <a:spLocks noGrp="1"/>
+          </p:cNvSpPr>
           <p:nvPr>
             <p:ph type="sldNum" sz="quarter" idx="2"/>
           </p:nvPr>
@@ -2277,8 +2373,10 @@
           <a:bodyPr/>
           <a:lstStyle/>
           <a:p>
-            <a:pPr/>
-            <a:fld id="{86CB4B4D-7CA3-9044-876B-883B54F8677D}" type="slidenum"/>
+            <a:fld id="{86CB4B4D-7CA3-9044-876B-883B54F8677D}" type="slidenum">
+              <a:t>‹#›</a:t>
+            </a:fld>
+            <a:endParaRPr/>
           </a:p>
         </p:txBody>
       </p:sp>
@@ -2287,18 +2385,19 @@
   <p:clrMapOvr>
     <a:masterClrMapping/>
   </p:clrMapOvr>
-  <p:transition xmlns:p14="http://schemas.microsoft.com/office/powerpoint/2010/main" spd="med" advClick="1"/>
+  <p:transition spd="med"/>
 </p:sldLayout>
 </file>
 
 <file path=ppt/slideMasters/slideMaster1.xml><?xml version="1.0" encoding="utf-8"?>
-<p:sldMaster xmlns:a="http://schemas.openxmlformats.org/drawingml/2006/main" xmlns:r="http://schemas.openxmlformats.org/officeDocument/2006/relationships" xmlns:p="http://schemas.openxmlformats.org/presentationml/2006/main" xmlns:m="http://schemas.openxmlformats.org/officeDocument/2006/math" xmlns:a14="http://schemas.microsoft.com/office/drawing/2010/main">
+<p:sldMaster xmlns:a="http://schemas.openxmlformats.org/drawingml/2006/main" xmlns:r="http://schemas.openxmlformats.org/officeDocument/2006/relationships" xmlns:p="http://schemas.openxmlformats.org/presentationml/2006/main">
   <p:cSld>
     <p:bg>
       <p:bgPr>
         <a:solidFill>
           <a:srgbClr val="FFFFFF"/>
         </a:solidFill>
+        <a:effectLst/>
       </p:bgPr>
     </p:bg>
     <p:spTree>
@@ -2318,7 +2417,9 @@
       <p:sp>
         <p:nvSpPr>
           <p:cNvPr id="2" name="Title Text"/>
-          <p:cNvSpPr txBox="1"/>
+          <p:cNvSpPr txBox="1">
+            <a:spLocks noGrp="1"/>
+          </p:cNvSpPr>
           <p:nvPr>
             <p:ph type="title"/>
           </p:nvPr>
@@ -2336,17 +2437,16 @@
           </a:ln>
           <a:extLst>
             <a:ext uri="{C572A759-6A51-4108-AA02-DFA0A04FC94B}">
-              <ma14:wrappingTextBoxFlag xmlns:ma14="http://schemas.microsoft.com/office/mac/drawingml/2011/main" val="1"/>
+              <ma14:wrappingTextBoxFlag xmlns="" xmlns:m="http://schemas.openxmlformats.org/officeDocument/2006/math" xmlns:a14="http://schemas.microsoft.com/office/drawing/2010/main" xmlns:ma14="http://schemas.microsoft.com/office/mac/drawingml/2011/main" val="1"/>
             </a:ext>
           </a:extLst>
         </p:spPr>
         <p:txBody>
           <a:bodyPr lIns="71437" tIns="71437" rIns="71437" bIns="71437" anchor="ctr">
-            <a:normAutofit fontScale="100000" lnSpcReduction="0"/>
+            <a:normAutofit/>
           </a:bodyPr>
           <a:lstStyle/>
           <a:p>
-            <a:pPr/>
             <a:r>
               <a:t>Title Text</a:t>
             </a:r>
@@ -2356,7 +2456,9 @@
       <p:sp>
         <p:nvSpPr>
           <p:cNvPr id="3" name="Body Level One…"/>
-          <p:cNvSpPr txBox="1"/>
+          <p:cNvSpPr txBox="1">
+            <a:spLocks noGrp="1"/>
+          </p:cNvSpPr>
           <p:nvPr>
             <p:ph type="body" idx="1"/>
           </p:nvPr>
@@ -2374,17 +2476,16 @@
           </a:ln>
           <a:extLst>
             <a:ext uri="{C572A759-6A51-4108-AA02-DFA0A04FC94B}">
-              <ma14:wrappingTextBoxFlag xmlns:ma14="http://schemas.microsoft.com/office/mac/drawingml/2011/main" val="1"/>
+              <ma14:wrappingTextBoxFlag xmlns="" xmlns:m="http://schemas.openxmlformats.org/officeDocument/2006/math" xmlns:a14="http://schemas.microsoft.com/office/drawing/2010/main" xmlns:ma14="http://schemas.microsoft.com/office/mac/drawingml/2011/main" val="1"/>
             </a:ext>
           </a:extLst>
         </p:spPr>
         <p:txBody>
           <a:bodyPr lIns="71437" tIns="71437" rIns="71437" bIns="71437" anchor="ctr">
-            <a:normAutofit fontScale="100000" lnSpcReduction="0"/>
+            <a:normAutofit/>
           </a:bodyPr>
           <a:lstStyle/>
           <a:p>
-            <a:pPr/>
             <a:r>
               <a:t>Body Level One</a:t>
             </a:r>
@@ -2418,7 +2519,9 @@
       <p:sp>
         <p:nvSpPr>
           <p:cNvPr id="4" name="Slide Number"/>
-          <p:cNvSpPr txBox="1"/>
+          <p:cNvSpPr txBox="1">
+            <a:spLocks noGrp="1"/>
+          </p:cNvSpPr>
           <p:nvPr>
             <p:ph type="sldNum" sz="quarter" idx="2"/>
           </p:nvPr>
@@ -2437,7 +2540,7 @@
         </p:spPr>
         <p:txBody>
           <a:bodyPr wrap="none" lIns="71437" tIns="71437" rIns="71437" bIns="71437">
-            <a:normAutofit fontScale="100000" lnSpcReduction="0"/>
+            <a:normAutofit/>
           </a:bodyPr>
           <a:lstStyle>
             <a:lvl1pPr>
@@ -2450,8 +2553,10 @@
             </a:lvl1pPr>
           </a:lstStyle>
           <a:p>
-            <a:pPr/>
-            <a:fld id="{86CB4B4D-7CA3-9044-876B-883B54F8677D}" type="slidenum"/>
+            <a:fld id="{86CB4B4D-7CA3-9044-876B-883B54F8677D}" type="slidenum">
+              <a:t>‹#›</a:t>
+            </a:fld>
+            <a:endParaRPr/>
           </a:p>
         </p:txBody>
       </p:sp>
@@ -2459,22 +2564,22 @@
   </p:cSld>
   <p:clrMap bg1="lt1" tx1="dk1" bg2="lt2" tx2="dk2" accent1="accent1" accent2="accent2" accent3="accent3" accent4="accent4" accent5="accent5" accent6="accent6" hlink="hlink" folHlink="folHlink"/>
   <p:sldLayoutIdLst>
-    <p:sldLayoutId id="2147483649" r:id="rId2"/>
-    <p:sldLayoutId id="2147483650" r:id="rId3"/>
-    <p:sldLayoutId id="2147483651" r:id="rId4"/>
-    <p:sldLayoutId id="2147483652" r:id="rId5"/>
-    <p:sldLayoutId id="2147483653" r:id="rId6"/>
-    <p:sldLayoutId id="2147483654" r:id="rId7"/>
-    <p:sldLayoutId id="2147483655" r:id="rId8"/>
-    <p:sldLayoutId id="2147483656" r:id="rId9"/>
-    <p:sldLayoutId id="2147483657" r:id="rId10"/>
-    <p:sldLayoutId id="2147483658" r:id="rId11"/>
-    <p:sldLayoutId id="2147483659" r:id="rId12"/>
-    <p:sldLayoutId id="2147483660" r:id="rId13"/>
-    <p:sldLayoutId id="2147483661" r:id="rId14"/>
-    <p:sldLayoutId id="2147483662" r:id="rId15"/>
+    <p:sldLayoutId id="2147483649" r:id="rId1"/>
+    <p:sldLayoutId id="2147483650" r:id="rId2"/>
+    <p:sldLayoutId id="2147483651" r:id="rId3"/>
+    <p:sldLayoutId id="2147483652" r:id="rId4"/>
+    <p:sldLayoutId id="2147483653" r:id="rId5"/>
+    <p:sldLayoutId id="2147483654" r:id="rId6"/>
+    <p:sldLayoutId id="2147483655" r:id="rId7"/>
+    <p:sldLayoutId id="2147483656" r:id="rId8"/>
+    <p:sldLayoutId id="2147483657" r:id="rId9"/>
+    <p:sldLayoutId id="2147483658" r:id="rId10"/>
+    <p:sldLayoutId id="2147483659" r:id="rId11"/>
+    <p:sldLayoutId id="2147483660" r:id="rId12"/>
+    <p:sldLayoutId id="2147483661" r:id="rId13"/>
+    <p:sldLayoutId id="2147483662" r:id="rId14"/>
   </p:sldLayoutIdLst>
-  <p:transition xmlns:p14="http://schemas.microsoft.com/office/powerpoint/2010/main" spd="med" advClick="1"/>
+  <p:transition spd="med"/>
   <p:txStyles>
     <p:titleStyle>
       <a:lvl1pPr marL="0" marR="0" indent="0" algn="ctr" defTabSz="821531" rtl="0" latinLnBrk="0">
@@ -2492,7 +2597,7 @@
         <a:buFontTx/>
         <a:buNone/>
         <a:tabLst/>
-        <a:defRPr b="1" baseline="0" cap="none" i="0" spc="0" strike="noStrike" sz="11200" u="none">
+        <a:defRPr sz="11200" b="1" i="0" u="none" strike="noStrike" cap="none" spc="0" baseline="0">
           <a:solidFill>
             <a:srgbClr val="000000"/>
           </a:solidFill>
@@ -2518,7 +2623,7 @@
         <a:buFontTx/>
         <a:buNone/>
         <a:tabLst/>
-        <a:defRPr b="1" baseline="0" cap="none" i="0" spc="0" strike="noStrike" sz="11200" u="none">
+        <a:defRPr sz="11200" b="1" i="0" u="none" strike="noStrike" cap="none" spc="0" baseline="0">
           <a:solidFill>
             <a:srgbClr val="000000"/>
           </a:solidFill>
@@ -2544,7 +2649,7 @@
         <a:buFontTx/>
         <a:buNone/>
         <a:tabLst/>
-        <a:defRPr b="1" baseline="0" cap="none" i="0" spc="0" strike="noStrike" sz="11200" u="none">
+        <a:defRPr sz="11200" b="1" i="0" u="none" strike="noStrike" cap="none" spc="0" baseline="0">
           <a:solidFill>
             <a:srgbClr val="000000"/>
           </a:solidFill>
@@ -2570,7 +2675,7 @@
         <a:buFontTx/>
         <a:buNone/>
         <a:tabLst/>
-        <a:defRPr b="1" baseline="0" cap="none" i="0" spc="0" strike="noStrike" sz="11200" u="none">
+        <a:defRPr sz="11200" b="1" i="0" u="none" strike="noStrike" cap="none" spc="0" baseline="0">
           <a:solidFill>
             <a:srgbClr val="000000"/>
           </a:solidFill>
@@ -2596,7 +2701,7 @@
         <a:buFontTx/>
         <a:buNone/>
         <a:tabLst/>
-        <a:defRPr b="1" baseline="0" cap="none" i="0" spc="0" strike="noStrike" sz="11200" u="none">
+        <a:defRPr sz="11200" b="1" i="0" u="none" strike="noStrike" cap="none" spc="0" baseline="0">
           <a:solidFill>
             <a:srgbClr val="000000"/>
           </a:solidFill>
@@ -2622,7 +2727,7 @@
         <a:buFontTx/>
         <a:buNone/>
         <a:tabLst/>
-        <a:defRPr b="1" baseline="0" cap="none" i="0" spc="0" strike="noStrike" sz="11200" u="none">
+        <a:defRPr sz="11200" b="1" i="0" u="none" strike="noStrike" cap="none" spc="0" baseline="0">
           <a:solidFill>
             <a:srgbClr val="000000"/>
           </a:solidFill>
@@ -2648,7 +2753,7 @@
         <a:buFontTx/>
         <a:buNone/>
         <a:tabLst/>
-        <a:defRPr b="1" baseline="0" cap="none" i="0" spc="0" strike="noStrike" sz="11200" u="none">
+        <a:defRPr sz="11200" b="1" i="0" u="none" strike="noStrike" cap="none" spc="0" baseline="0">
           <a:solidFill>
             <a:srgbClr val="000000"/>
           </a:solidFill>
@@ -2674,7 +2779,7 @@
         <a:buFontTx/>
         <a:buNone/>
         <a:tabLst/>
-        <a:defRPr b="1" baseline="0" cap="none" i="0" spc="0" strike="noStrike" sz="11200" u="none">
+        <a:defRPr sz="11200" b="1" i="0" u="none" strike="noStrike" cap="none" spc="0" baseline="0">
           <a:solidFill>
             <a:srgbClr val="000000"/>
           </a:solidFill>
@@ -2700,7 +2805,7 @@
         <a:buFontTx/>
         <a:buNone/>
         <a:tabLst/>
-        <a:defRPr b="1" baseline="0" cap="none" i="0" spc="0" strike="noStrike" sz="11200" u="none">
+        <a:defRPr sz="11200" b="1" i="0" u="none" strike="noStrike" cap="none" spc="0" baseline="0">
           <a:solidFill>
             <a:srgbClr val="000000"/>
           </a:solidFill>
@@ -2728,7 +2833,7 @@
         <a:buFontTx/>
         <a:buChar char="•"/>
         <a:tabLst/>
-        <a:defRPr b="0" baseline="0" cap="none" i="0" spc="0" strike="noStrike" sz="5000" u="none">
+        <a:defRPr sz="5000" b="0" i="0" u="none" strike="noStrike" cap="none" spc="0" baseline="0">
           <a:solidFill>
             <a:srgbClr val="000000"/>
           </a:solidFill>
@@ -2754,7 +2859,7 @@
         <a:buFontTx/>
         <a:buChar char="•"/>
         <a:tabLst/>
-        <a:defRPr b="0" baseline="0" cap="none" i="0" spc="0" strike="noStrike" sz="5000" u="none">
+        <a:defRPr sz="5000" b="0" i="0" u="none" strike="noStrike" cap="none" spc="0" baseline="0">
           <a:solidFill>
             <a:srgbClr val="000000"/>
           </a:solidFill>
@@ -2780,7 +2885,7 @@
         <a:buFontTx/>
         <a:buChar char="•"/>
         <a:tabLst/>
-        <a:defRPr b="0" baseline="0" cap="none" i="0" spc="0" strike="noStrike" sz="5000" u="none">
+        <a:defRPr sz="5000" b="0" i="0" u="none" strike="noStrike" cap="none" spc="0" baseline="0">
           <a:solidFill>
             <a:srgbClr val="000000"/>
           </a:solidFill>
@@ -2806,7 +2911,7 @@
         <a:buFontTx/>
         <a:buChar char="•"/>
         <a:tabLst/>
-        <a:defRPr b="0" baseline="0" cap="none" i="0" spc="0" strike="noStrike" sz="5000" u="none">
+        <a:defRPr sz="5000" b="0" i="0" u="none" strike="noStrike" cap="none" spc="0" baseline="0">
           <a:solidFill>
             <a:srgbClr val="000000"/>
           </a:solidFill>
@@ -2832,7 +2937,7 @@
         <a:buFontTx/>
         <a:buChar char="•"/>
         <a:tabLst/>
-        <a:defRPr b="0" baseline="0" cap="none" i="0" spc="0" strike="noStrike" sz="5000" u="none">
+        <a:defRPr sz="5000" b="0" i="0" u="none" strike="noStrike" cap="none" spc="0" baseline="0">
           <a:solidFill>
             <a:srgbClr val="000000"/>
           </a:solidFill>
@@ -2858,7 +2963,7 @@
         <a:buFontTx/>
         <a:buChar char="•"/>
         <a:tabLst/>
-        <a:defRPr b="0" baseline="0" cap="none" i="0" spc="0" strike="noStrike" sz="5000" u="none">
+        <a:defRPr sz="5000" b="0" i="0" u="none" strike="noStrike" cap="none" spc="0" baseline="0">
           <a:solidFill>
             <a:srgbClr val="000000"/>
           </a:solidFill>
@@ -2884,7 +2989,7 @@
         <a:buFontTx/>
         <a:buChar char="•"/>
         <a:tabLst/>
-        <a:defRPr b="0" baseline="0" cap="none" i="0" spc="0" strike="noStrike" sz="5000" u="none">
+        <a:defRPr sz="5000" b="0" i="0" u="none" strike="noStrike" cap="none" spc="0" baseline="0">
           <a:solidFill>
             <a:srgbClr val="000000"/>
           </a:solidFill>
@@ -2910,7 +3015,7 @@
         <a:buFontTx/>
         <a:buChar char="•"/>
         <a:tabLst/>
-        <a:defRPr b="0" baseline="0" cap="none" i="0" spc="0" strike="noStrike" sz="5000" u="none">
+        <a:defRPr sz="5000" b="0" i="0" u="none" strike="noStrike" cap="none" spc="0" baseline="0">
           <a:solidFill>
             <a:srgbClr val="000000"/>
           </a:solidFill>
@@ -2936,7 +3041,7 @@
         <a:buFontTx/>
         <a:buChar char="•"/>
         <a:tabLst/>
-        <a:defRPr b="0" baseline="0" cap="none" i="0" spc="0" strike="noStrike" sz="5000" u="none">
+        <a:defRPr sz="5000" b="0" i="0" u="none" strike="noStrike" cap="none" spc="0" baseline="0">
           <a:solidFill>
             <a:srgbClr val="000000"/>
           </a:solidFill>
@@ -2964,7 +3069,7 @@
         <a:buFontTx/>
         <a:buNone/>
         <a:tabLst/>
-        <a:defRPr b="0" baseline="0" cap="none" i="0" spc="0" strike="noStrike" sz="2400" u="none">
+        <a:defRPr sz="2400" b="0" i="0" u="none" strike="noStrike" cap="none" spc="0" baseline="0">
           <a:solidFill>
             <a:schemeClr val="tx1"/>
           </a:solidFill>
@@ -2990,7 +3095,7 @@
         <a:buFontTx/>
         <a:buNone/>
         <a:tabLst/>
-        <a:defRPr b="0" baseline="0" cap="none" i="0" spc="0" strike="noStrike" sz="2400" u="none">
+        <a:defRPr sz="2400" b="0" i="0" u="none" strike="noStrike" cap="none" spc="0" baseline="0">
           <a:solidFill>
             <a:schemeClr val="tx1"/>
           </a:solidFill>
@@ -3016,7 +3121,7 @@
         <a:buFontTx/>
         <a:buNone/>
         <a:tabLst/>
-        <a:defRPr b="0" baseline="0" cap="none" i="0" spc="0" strike="noStrike" sz="2400" u="none">
+        <a:defRPr sz="2400" b="0" i="0" u="none" strike="noStrike" cap="none" spc="0" baseline="0">
           <a:solidFill>
             <a:schemeClr val="tx1"/>
           </a:solidFill>
@@ -3042,7 +3147,7 @@
         <a:buFontTx/>
         <a:buNone/>
         <a:tabLst/>
-        <a:defRPr b="0" baseline="0" cap="none" i="0" spc="0" strike="noStrike" sz="2400" u="none">
+        <a:defRPr sz="2400" b="0" i="0" u="none" strike="noStrike" cap="none" spc="0" baseline="0">
           <a:solidFill>
             <a:schemeClr val="tx1"/>
           </a:solidFill>
@@ -3068,7 +3173,7 @@
         <a:buFontTx/>
         <a:buNone/>
         <a:tabLst/>
-        <a:defRPr b="0" baseline="0" cap="none" i="0" spc="0" strike="noStrike" sz="2400" u="none">
+        <a:defRPr sz="2400" b="0" i="0" u="none" strike="noStrike" cap="none" spc="0" baseline="0">
           <a:solidFill>
             <a:schemeClr val="tx1"/>
           </a:solidFill>
@@ -3094,7 +3199,7 @@
         <a:buFontTx/>
         <a:buNone/>
         <a:tabLst/>
-        <a:defRPr b="0" baseline="0" cap="none" i="0" spc="0" strike="noStrike" sz="2400" u="none">
+        <a:defRPr sz="2400" b="0" i="0" u="none" strike="noStrike" cap="none" spc="0" baseline="0">
           <a:solidFill>
             <a:schemeClr val="tx1"/>
           </a:solidFill>
@@ -3120,7 +3225,7 @@
         <a:buFontTx/>
         <a:buNone/>
         <a:tabLst/>
-        <a:defRPr b="0" baseline="0" cap="none" i="0" spc="0" strike="noStrike" sz="2400" u="none">
+        <a:defRPr sz="2400" b="0" i="0" u="none" strike="noStrike" cap="none" spc="0" baseline="0">
           <a:solidFill>
             <a:schemeClr val="tx1"/>
           </a:solidFill>
@@ -3146,7 +3251,7 @@
         <a:buFontTx/>
         <a:buNone/>
         <a:tabLst/>
-        <a:defRPr b="0" baseline="0" cap="none" i="0" spc="0" strike="noStrike" sz="2400" u="none">
+        <a:defRPr sz="2400" b="0" i="0" u="none" strike="noStrike" cap="none" spc="0" baseline="0">
           <a:solidFill>
             <a:schemeClr val="tx1"/>
           </a:solidFill>
@@ -3172,7 +3277,7 @@
         <a:buFontTx/>
         <a:buNone/>
         <a:tabLst/>
-        <a:defRPr b="0" baseline="0" cap="none" i="0" spc="0" strike="noStrike" sz="2400" u="none">
+        <a:defRPr sz="2400" b="0" i="0" u="none" strike="noStrike" cap="none" spc="0" baseline="0">
           <a:solidFill>
             <a:schemeClr val="tx1"/>
           </a:solidFill>
@@ -3189,7 +3294,7 @@
 </file>
 
 <file path=ppt/slides/slide1.xml><?xml version="1.0" encoding="utf-8"?>
-<p:sld xmlns:a="http://schemas.openxmlformats.org/drawingml/2006/main" xmlns:r="http://schemas.openxmlformats.org/officeDocument/2006/relationships" xmlns:p="http://schemas.openxmlformats.org/presentationml/2006/main" xmlns:m="http://schemas.openxmlformats.org/officeDocument/2006/math" xmlns:a14="http://schemas.microsoft.com/office/drawing/2010/main" showMasterSp="1" showMasterPhAnim="1">
+<p:sld xmlns:a="http://schemas.openxmlformats.org/drawingml/2006/main" xmlns:r="http://schemas.openxmlformats.org/officeDocument/2006/relationships" xmlns:p="http://schemas.openxmlformats.org/presentationml/2006/main">
   <p:cSld>
     <p:spTree>
       <p:nvGrpSpPr>
@@ -3208,7 +3313,9 @@
       <p:sp>
         <p:nvSpPr>
           <p:cNvPr id="137" name="9/16/2024"/>
-          <p:cNvSpPr txBox="1"/>
+          <p:cNvSpPr txBox="1">
+            <a:spLocks noGrp="1"/>
+          </p:cNvSpPr>
           <p:nvPr>
             <p:ph type="title"/>
           </p:nvPr>
@@ -3224,15 +3331,35 @@
           <a:p>
             <a:pPr lvl="1"/>
             <a:r>
-              <a:t>9/16/2024</a:t>
-            </a:r>
+              <a:rPr lang="en-US" dirty="0"/>
+              <a:t>2</a:t>
+            </a:r>
+            <a:r>
+              <a:rPr dirty="0"/>
+              <a:t>/</a:t>
+            </a:r>
+            <a:r>
+              <a:rPr lang="en-US" dirty="0"/>
+              <a:t>4</a:t>
+            </a:r>
+            <a:r>
+              <a:rPr dirty="0"/>
+              <a:t>/202</a:t>
+            </a:r>
+            <a:r>
+              <a:rPr lang="en-US" dirty="0"/>
+              <a:t>6</a:t>
+            </a:r>
+            <a:endParaRPr dirty="0"/>
           </a:p>
         </p:txBody>
       </p:sp>
       <p:sp>
         <p:nvSpPr>
           <p:cNvPr id="138" name="Quiz 3 (30 minutes)…"/>
-          <p:cNvSpPr txBox="1"/>
+          <p:cNvSpPr txBox="1">
+            <a:spLocks noGrp="1"/>
+          </p:cNvSpPr>
           <p:nvPr>
             <p:ph type="body" idx="1"/>
           </p:nvPr>
@@ -3246,41 +3373,55 @@
           <a:bodyPr/>
           <a:lstStyle/>
           <a:p>
-            <a:pPr/>
-            <a:r>
-              <a:t>Quiz 3 (30 minutes)</a:t>
-            </a:r>
-          </a:p>
-          <a:p>
-            <a:pPr/>
-            <a:r>
-              <a:rPr u="sng">
-                <a:hlinkClick r:id="rId2" invalidUrl="" action="" tgtFrame="" tooltip="" history="1" highlightClick="0" endSnd="0"/>
+            <a:r>
+              <a:rPr u="sng" dirty="0">
+                <a:hlinkClick r:id="rId2"/>
               </a:rPr>
               <a:t>Biological target presentation and report</a:t>
             </a:r>
-          </a:p>
-          <a:p>
-            <a:pPr/>
-            <a:r>
+            <a:endParaRPr u="sng" dirty="0">
+              <a:hlinkClick r:id="rId3"/>
+            </a:endParaRPr>
+          </a:p>
+          <a:p>
+            <a:r>
+              <a:rPr dirty="0"/>
               <a:t>Searching the scientific literature </a:t>
             </a:r>
           </a:p>
           <a:p>
             <a:pPr lvl="1"/>
             <a:r>
-              <a:t>Databases</a:t>
-            </a:r>
+              <a:rPr lang="en-US" dirty="0"/>
+              <a:t>Biochemistry-related databases</a:t>
+            </a:r>
+          </a:p>
+          <a:p>
+            <a:pPr lvl="2"/>
+            <a:r>
+              <a:rPr lang="en-US" dirty="0"/>
+              <a:t>Scientific literature</a:t>
+            </a:r>
+          </a:p>
+          <a:p>
+            <a:pPr lvl="2"/>
+            <a:r>
+              <a:rPr lang="en-US" dirty="0"/>
+              <a:t>Biological activity</a:t>
+            </a:r>
+            <a:endParaRPr dirty="0"/>
           </a:p>
           <a:p>
             <a:pPr lvl="1"/>
             <a:r>
+              <a:rPr dirty="0"/>
               <a:t>Accessing articles</a:t>
             </a:r>
           </a:p>
           <a:p>
             <a:pPr lvl="1"/>
             <a:r>
+              <a:rPr dirty="0"/>
               <a:t>Search strategies</a:t>
             </a:r>
           </a:p>
@@ -3289,13 +3430,16 @@
             <a:r>
               <a:t>Zotero</a:t>
             </a:r>
+            <a:endParaRPr lang="en-US" dirty="0"/>
           </a:p>
         </p:txBody>
       </p:sp>
       <p:sp>
         <p:nvSpPr>
           <p:cNvPr id="139" name="Slide Number"/>
-          <p:cNvSpPr txBox="1"/>
+          <p:cNvSpPr txBox="1">
+            <a:spLocks noGrp="1"/>
+          </p:cNvSpPr>
           <p:nvPr>
             <p:ph type="sldNum" sz="quarter" idx="2"/>
           </p:nvPr>
@@ -3310,7 +3454,7 @@
           </a:prstGeom>
           <a:extLst>
             <a:ext uri="{C572A759-6A51-4108-AA02-DFA0A04FC94B}">
-              <ma14:wrappingTextBoxFlag xmlns:ma14="http://schemas.microsoft.com/office/mac/drawingml/2011/main" val="1"/>
+              <ma14:wrappingTextBoxFlag xmlns="" xmlns:m="http://schemas.openxmlformats.org/officeDocument/2006/math" xmlns:a14="http://schemas.microsoft.com/office/drawing/2010/main" xmlns:ma14="http://schemas.microsoft.com/office/mac/drawingml/2011/main" val="1"/>
             </a:ext>
           </a:extLst>
         </p:spPr>
@@ -3318,8 +3462,11 @@
           <a:bodyPr/>
           <a:lstStyle/>
           <a:p>
-            <a:pPr/>
-            <a:fld id="{86CB4B4D-7CA3-9044-876B-883B54F8677D}" type="slidenum"/>
+            <a:fld id="{86CB4B4D-7CA3-9044-876B-883B54F8677D}" type="slidenum">
+              <a:rPr/>
+              <a:t>1</a:t>
+            </a:fld>
+            <a:endParaRPr/>
           </a:p>
         </p:txBody>
       </p:sp>
@@ -3328,184 +3475,12 @@
   <p:clrMapOvr>
     <a:masterClrMapping/>
   </p:clrMapOvr>
-  <p:transition xmlns:p14="http://schemas.microsoft.com/office/powerpoint/2010/main" spd="med" advClick="1"/>
+  <p:transition spd="med"/>
 </p:sld>
 </file>
 
 <file path=ppt/slides/slide2.xml><?xml version="1.0" encoding="utf-8"?>
-<p:sld xmlns:a="http://schemas.openxmlformats.org/drawingml/2006/main" xmlns:r="http://schemas.openxmlformats.org/officeDocument/2006/relationships" xmlns:p="http://schemas.openxmlformats.org/presentationml/2006/main" xmlns:m="http://schemas.openxmlformats.org/officeDocument/2006/math" xmlns:a14="http://schemas.microsoft.com/office/drawing/2010/main" showMasterSp="1" showMasterPhAnim="1">
-  <p:cSld>
-    <p:spTree>
-      <p:nvGrpSpPr>
-        <p:cNvPr id="1" name=""/>
-        <p:cNvGrpSpPr/>
-        <p:nvPr/>
-      </p:nvGrpSpPr>
-      <p:grpSpPr>
-        <a:xfrm>
-          <a:off x="0" y="0"/>
-          <a:ext cx="0" cy="0"/>
-          <a:chOff x="0" y="0"/>
-          <a:chExt cx="0" cy="0"/>
-        </a:xfrm>
-      </p:grpSpPr>
-      <p:sp>
-        <p:nvSpPr>
-          <p:cNvPr id="141" name="Quiz 1"/>
-          <p:cNvSpPr txBox="1"/>
-          <p:nvPr>
-            <p:ph type="title"/>
-          </p:nvPr>
-        </p:nvSpPr>
-        <p:spPr>
-          <a:prstGeom prst="rect">
-            <a:avLst/>
-          </a:prstGeom>
-        </p:spPr>
-        <p:txBody>
-          <a:bodyPr/>
-          <a:lstStyle/>
-          <a:p>
-            <a:pPr/>
-            <a:r>
-              <a:t>Quiz 1</a:t>
-            </a:r>
-          </a:p>
-        </p:txBody>
-      </p:sp>
-      <p:sp>
-        <p:nvSpPr>
-          <p:cNvPr id="142" name="Go to the Canvas page and look under “Assignments” to find Quiz 1.…"/>
-          <p:cNvSpPr txBox="1"/>
-          <p:nvPr>
-            <p:ph type="body" sz="quarter" idx="1"/>
-          </p:nvPr>
-        </p:nvSpPr>
-        <p:spPr>
-          <a:xfrm>
-            <a:off x="635000" y="3175000"/>
-            <a:ext cx="6345438" cy="9842500"/>
-          </a:xfrm>
-          <a:prstGeom prst="rect">
-            <a:avLst/>
-          </a:prstGeom>
-        </p:spPr>
-        <p:txBody>
-          <a:bodyPr/>
-          <a:lstStyle/>
-          <a:p>
-            <a:pPr marL="586493" indent="-586493" defTabSz="780454">
-              <a:defRPr sz="4750"/>
-            </a:pPr>
-            <a:r>
-              <a:t>Go to the Canvas page and look under “Assignments” to find Quiz 1.</a:t>
-            </a:r>
-          </a:p>
-          <a:p>
-            <a:pPr marL="586493" indent="-586493" defTabSz="780454">
-              <a:defRPr sz="4750"/>
-            </a:pPr>
-            <a:r>
-              <a:t>Download the file</a:t>
-            </a:r>
-          </a:p>
-          <a:p>
-            <a:pPr marL="586493" indent="-586493" defTabSz="780454">
-              <a:defRPr sz="4750"/>
-            </a:pPr>
-            <a:r>
-              <a:t>Upload it to your shared folder on Google Drive under  “quizzes”</a:t>
-            </a:r>
-          </a:p>
-          <a:p>
-            <a:pPr marL="586493" indent="-586493" defTabSz="780454">
-              <a:defRPr sz="4750"/>
-            </a:pPr>
-            <a:r>
-              <a:t>Work on it. Save it at the end of the quiz.</a:t>
-            </a:r>
-          </a:p>
-          <a:p>
-            <a:pPr marL="586493" indent="-586493" defTabSz="780454">
-              <a:defRPr sz="4750"/>
-            </a:pPr>
-            <a:r>
-              <a:t>Submit it on Canvas.</a:t>
-            </a:r>
-          </a:p>
-        </p:txBody>
-      </p:sp>
-      <p:sp>
-        <p:nvSpPr>
-          <p:cNvPr id="143" name="Slide Number"/>
-          <p:cNvSpPr txBox="1"/>
-          <p:nvPr>
-            <p:ph type="sldNum" sz="quarter" idx="2"/>
-          </p:nvPr>
-        </p:nvSpPr>
-        <p:spPr>
-          <a:xfrm>
-            <a:off x="12020548" y="13010554"/>
-            <a:ext cx="325045" cy="511176"/>
-          </a:xfrm>
-          <a:prstGeom prst="rect">
-            <a:avLst/>
-          </a:prstGeom>
-          <a:extLst>
-            <a:ext uri="{C572A759-6A51-4108-AA02-DFA0A04FC94B}">
-              <ma14:wrappingTextBoxFlag xmlns:ma14="http://schemas.microsoft.com/office/mac/drawingml/2011/main" val="1"/>
-            </a:ext>
-          </a:extLst>
-        </p:spPr>
-        <p:txBody>
-          <a:bodyPr/>
-          <a:lstStyle/>
-          <a:p>
-            <a:pPr/>
-            <a:fld id="{86CB4B4D-7CA3-9044-876B-883B54F8677D}" type="slidenum"/>
-          </a:p>
-        </p:txBody>
-      </p:sp>
-      <p:pic>
-        <p:nvPicPr>
-          <p:cNvPr id="144" name="pasted-movie.png" descr="pasted-movie.png"/>
-          <p:cNvPicPr>
-            <a:picLocks noChangeAspect="1"/>
-          </p:cNvPicPr>
-          <p:nvPr/>
-        </p:nvPicPr>
-        <p:blipFill>
-          <a:blip r:embed="rId2">
-            <a:extLst/>
-          </a:blip>
-          <a:stretch>
-            <a:fillRect/>
-          </a:stretch>
-        </p:blipFill>
-        <p:spPr>
-          <a:xfrm>
-            <a:off x="8559813" y="5336257"/>
-            <a:ext cx="14608752" cy="5519985"/>
-          </a:xfrm>
-          <a:prstGeom prst="rect">
-            <a:avLst/>
-          </a:prstGeom>
-          <a:ln w="12700">
-            <a:miter lim="400000"/>
-          </a:ln>
-        </p:spPr>
-      </p:pic>
-    </p:spTree>
-  </p:cSld>
-  <p:clrMapOvr>
-    <a:masterClrMapping/>
-  </p:clrMapOvr>
-  <p:transition xmlns:p14="http://schemas.microsoft.com/office/powerpoint/2010/main" spd="med" advClick="1"/>
-</p:sld>
-</file>
-
-<file path=ppt/slides/slide3.xml><?xml version="1.0" encoding="utf-8"?>
-<p:sld xmlns:a="http://schemas.openxmlformats.org/drawingml/2006/main" xmlns:r="http://schemas.openxmlformats.org/officeDocument/2006/relationships" xmlns:p="http://schemas.openxmlformats.org/presentationml/2006/main" xmlns:m="http://schemas.openxmlformats.org/officeDocument/2006/math" xmlns:a14="http://schemas.microsoft.com/office/drawing/2010/main" showMasterSp="1" showMasterPhAnim="1">
+<p:sld xmlns:a="http://schemas.openxmlformats.org/drawingml/2006/main" xmlns:r="http://schemas.openxmlformats.org/officeDocument/2006/relationships" xmlns:p="http://schemas.openxmlformats.org/presentationml/2006/main">
   <p:cSld>
     <p:spTree>
       <p:nvGrpSpPr>
@@ -3524,7 +3499,9 @@
       <p:sp>
         <p:nvSpPr>
           <p:cNvPr id="146" name="Biochemistry-related databases"/>
-          <p:cNvSpPr txBox="1"/>
+          <p:cNvSpPr txBox="1">
+            <a:spLocks noGrp="1"/>
+          </p:cNvSpPr>
           <p:nvPr>
             <p:ph type="title"/>
           </p:nvPr>
@@ -3535,11 +3512,13 @@
           </a:prstGeom>
         </p:spPr>
         <p:txBody>
-          <a:bodyPr/>
+          <a:bodyPr>
+            <a:normAutofit/>
+          </a:bodyPr>
           <a:lstStyle/>
           <a:p>
-            <a:pPr/>
-            <a:r>
+            <a:r>
+              <a:rPr dirty="0"/>
               <a:t>Biochemistry-related databases</a:t>
             </a:r>
           </a:p>
@@ -3548,7 +3527,9 @@
       <p:sp>
         <p:nvSpPr>
           <p:cNvPr id="147" name="Google/Google Scholar…"/>
-          <p:cNvSpPr txBox="1"/>
+          <p:cNvSpPr txBox="1">
+            <a:spLocks noGrp="1"/>
+          </p:cNvSpPr>
           <p:nvPr>
             <p:ph type="body" idx="1"/>
           </p:nvPr>
@@ -3559,39 +3540,127 @@
           </a:prstGeom>
         </p:spPr>
         <p:txBody>
-          <a:bodyPr/>
+          <a:bodyPr>
+            <a:normAutofit lnSpcReduction="10000"/>
+          </a:bodyPr>
           <a:lstStyle/>
           <a:p>
-            <a:pPr/>
-            <a:r>
+            <a:r>
+              <a:rPr lang="en-US" dirty="0"/>
+              <a:t>Scientific Literature</a:t>
+            </a:r>
+          </a:p>
+          <a:p>
+            <a:pPr lvl="1"/>
+            <a:r>
+              <a:rPr dirty="0"/>
               <a:t>Google/Google Scholar</a:t>
             </a:r>
           </a:p>
           <a:p>
-            <a:pPr/>
-            <a:r>
+            <a:pPr lvl="1"/>
+            <a:r>
+              <a:rPr dirty="0"/>
               <a:t>Web of Science</a:t>
             </a:r>
           </a:p>
           <a:p>
-            <a:pPr/>
-            <a:r>
+            <a:pPr lvl="1"/>
+            <a:r>
+              <a:rPr dirty="0"/>
               <a:t>PubMed</a:t>
             </a:r>
           </a:p>
           <a:p>
-            <a:pPr/>
-          </a:p>
-          <a:p>
-            <a:pPr/>
-            <a:r>
+            <a:pPr lvl="1"/>
+            <a:r>
+              <a:rPr dirty="0"/>
               <a:t>Others: </a:t>
             </a:r>
             <a:r>
-              <a:rPr u="sng">
-                <a:hlinkClick r:id="rId2" invalidUrl="" action="" tgtFrame="" tooltip="" history="1" highlightClick="0" endSnd="0"/>
+              <a:rPr u="sng" dirty="0">
+                <a:hlinkClick r:id="rId2"/>
               </a:rPr>
               <a:t>https://guides.library.iit.edu/c.php?g=474723&amp;p=3248565</a:t>
+            </a:r>
+            <a:endParaRPr lang="en-US" u="sng" dirty="0">
+              <a:hlinkClick r:id="rId2"/>
+            </a:endParaRPr>
+          </a:p>
+          <a:p>
+            <a:endParaRPr lang="en-US" u="sng" dirty="0">
+              <a:hlinkClick r:id="rId2"/>
+            </a:endParaRPr>
+          </a:p>
+          <a:p>
+            <a:r>
+              <a:rPr lang="en-US" dirty="0"/>
+              <a:t>GPCR Database: </a:t>
+            </a:r>
+            <a:r>
+              <a:rPr lang="en-US" dirty="0">
+                <a:hlinkClick r:id="rId3"/>
+              </a:rPr>
+              <a:t>https://gpcrdb.org/</a:t>
+            </a:r>
+            <a:endParaRPr lang="en-US" dirty="0"/>
+          </a:p>
+          <a:p>
+            <a:pPr lvl="1"/>
+            <a:r>
+              <a:rPr lang="en-US" dirty="0"/>
+              <a:t>“</a:t>
+            </a:r>
+            <a:r>
+              <a:rPr lang="en-US" dirty="0" err="1"/>
+              <a:t>GPCRdb</a:t>
+            </a:r>
+            <a:r>
+              <a:rPr lang="en-US" dirty="0"/>
+              <a:t>, </a:t>
+            </a:r>
+            <a:r>
+              <a:rPr lang="en-US" dirty="0" err="1"/>
+              <a:t>GproteinDb</a:t>
+            </a:r>
+            <a:r>
+              <a:rPr lang="en-US" dirty="0"/>
+              <a:t>, </a:t>
+            </a:r>
+            <a:r>
+              <a:rPr lang="en-US" dirty="0" err="1"/>
+              <a:t>ArrestinDb</a:t>
+            </a:r>
+            <a:r>
+              <a:rPr lang="en-US" dirty="0"/>
+              <a:t> and Biased Signaling Atlas cover related aspects of signal transduction while serving dedicated research communities and use cases.”</a:t>
+            </a:r>
+          </a:p>
+          <a:p>
+            <a:r>
+              <a:rPr lang="en-US" dirty="0"/>
+              <a:t>PubChem: </a:t>
+            </a:r>
+            <a:r>
+              <a:rPr lang="en-US" dirty="0">
+                <a:hlinkClick r:id="rId4"/>
+              </a:rPr>
+              <a:t>https://pubchem.ncbi.nlm.nih.gov/</a:t>
+            </a:r>
+            <a:endParaRPr lang="en-US" dirty="0"/>
+          </a:p>
+          <a:p>
+            <a:pPr lvl="1"/>
+            <a:r>
+              <a:rPr lang="en-US" dirty="0"/>
+              <a:t>Includes biological activity of many chemical entities</a:t>
+            </a:r>
+          </a:p>
+          <a:p>
+            <a:pPr lvl="1"/>
+            <a:r>
+              <a:rPr lang="en-US" dirty="0"/>
+              <a:t>Chemicals often identified by SMILES strings</a:t>
             </a:r>
           </a:p>
         </p:txBody>
@@ -3599,7 +3668,9 @@
       <p:sp>
         <p:nvSpPr>
           <p:cNvPr id="148" name="Slide Number"/>
-          <p:cNvSpPr txBox="1"/>
+          <p:cNvSpPr txBox="1">
+            <a:spLocks noGrp="1"/>
+          </p:cNvSpPr>
           <p:nvPr>
             <p:ph type="sldNum" sz="quarter" idx="2"/>
           </p:nvPr>
@@ -3614,7 +3685,7 @@
           </a:prstGeom>
           <a:extLst>
             <a:ext uri="{C572A759-6A51-4108-AA02-DFA0A04FC94B}">
-              <ma14:wrappingTextBoxFlag xmlns:ma14="http://schemas.microsoft.com/office/mac/drawingml/2011/main" val="1"/>
+              <ma14:wrappingTextBoxFlag xmlns="" xmlns:m="http://schemas.openxmlformats.org/officeDocument/2006/math" xmlns:a14="http://schemas.microsoft.com/office/drawing/2010/main" xmlns:ma14="http://schemas.microsoft.com/office/mac/drawingml/2011/main" val="1"/>
             </a:ext>
           </a:extLst>
         </p:spPr>
@@ -3622,8 +3693,11 @@
           <a:bodyPr/>
           <a:lstStyle/>
           <a:p>
-            <a:pPr/>
-            <a:fld id="{86CB4B4D-7CA3-9044-876B-883B54F8677D}" type="slidenum"/>
+            <a:fld id="{86CB4B4D-7CA3-9044-876B-883B54F8677D}" type="slidenum">
+              <a:rPr/>
+              <a:t>2</a:t>
+            </a:fld>
+            <a:endParaRPr/>
           </a:p>
         </p:txBody>
       </p:sp>
@@ -3632,12 +3706,12 @@
   <p:clrMapOvr>
     <a:masterClrMapping/>
   </p:clrMapOvr>
-  <p:transition xmlns:p14="http://schemas.microsoft.com/office/powerpoint/2010/main" spd="med" advClick="1"/>
+  <p:transition spd="med"/>
 </p:sld>
 </file>
 
-<file path=ppt/slides/slide4.xml><?xml version="1.0" encoding="utf-8"?>
-<p:sld xmlns:a="http://schemas.openxmlformats.org/drawingml/2006/main" xmlns:r="http://schemas.openxmlformats.org/officeDocument/2006/relationships" xmlns:p="http://schemas.openxmlformats.org/presentationml/2006/main" xmlns:m="http://schemas.openxmlformats.org/officeDocument/2006/math" xmlns:a14="http://schemas.microsoft.com/office/drawing/2010/main" showMasterSp="1" showMasterPhAnim="1">
+<file path=ppt/slides/slide3.xml><?xml version="1.0" encoding="utf-8"?>
+<p:sld xmlns:a="http://schemas.openxmlformats.org/drawingml/2006/main" xmlns:r="http://schemas.openxmlformats.org/officeDocument/2006/relationships" xmlns:p="http://schemas.openxmlformats.org/presentationml/2006/main">
   <p:cSld>
     <p:spTree>
       <p:nvGrpSpPr>
@@ -3656,7 +3730,9 @@
       <p:sp>
         <p:nvSpPr>
           <p:cNvPr id="150" name="Accessing articles"/>
-          <p:cNvSpPr txBox="1"/>
+          <p:cNvSpPr txBox="1">
+            <a:spLocks noGrp="1"/>
+          </p:cNvSpPr>
           <p:nvPr>
             <p:ph type="title"/>
           </p:nvPr>
@@ -3670,7 +3746,6 @@
           <a:bodyPr/>
           <a:lstStyle/>
           <a:p>
-            <a:pPr/>
             <a:r>
               <a:t>Accessing articles</a:t>
             </a:r>
@@ -3680,7 +3755,9 @@
       <p:sp>
         <p:nvSpPr>
           <p:cNvPr id="151" name="Free…"/>
-          <p:cNvSpPr txBox="1"/>
+          <p:cNvSpPr txBox="1">
+            <a:spLocks noGrp="1"/>
+          </p:cNvSpPr>
           <p:nvPr>
             <p:ph type="body" idx="1"/>
           </p:nvPr>
@@ -3694,7 +3771,6 @@
           <a:bodyPr/>
           <a:lstStyle/>
           <a:p>
-            <a:pPr/>
             <a:r>
               <a:t>Free</a:t>
             </a:r>
@@ -3724,7 +3800,6 @@
             </a:r>
           </a:p>
           <a:p>
-            <a:pPr/>
             <a:r>
               <a:t>Paywall</a:t>
             </a:r>
@@ -3764,7 +3839,9 @@
       <p:sp>
         <p:nvSpPr>
           <p:cNvPr id="152" name="Slide Number"/>
-          <p:cNvSpPr txBox="1"/>
+          <p:cNvSpPr txBox="1">
+            <a:spLocks noGrp="1"/>
+          </p:cNvSpPr>
           <p:nvPr>
             <p:ph type="sldNum" sz="quarter" idx="2"/>
           </p:nvPr>
@@ -3779,7 +3856,7 @@
           </a:prstGeom>
           <a:extLst>
             <a:ext uri="{C572A759-6A51-4108-AA02-DFA0A04FC94B}">
-              <ma14:wrappingTextBoxFlag xmlns:ma14="http://schemas.microsoft.com/office/mac/drawingml/2011/main" val="1"/>
+              <ma14:wrappingTextBoxFlag xmlns="" xmlns:m="http://schemas.openxmlformats.org/officeDocument/2006/math" xmlns:a14="http://schemas.microsoft.com/office/drawing/2010/main" xmlns:ma14="http://schemas.microsoft.com/office/mac/drawingml/2011/main" val="1"/>
             </a:ext>
           </a:extLst>
         </p:spPr>
@@ -3787,8 +3864,11 @@
           <a:bodyPr/>
           <a:lstStyle/>
           <a:p>
-            <a:pPr/>
-            <a:fld id="{86CB4B4D-7CA3-9044-876B-883B54F8677D}" type="slidenum"/>
+            <a:fld id="{86CB4B4D-7CA3-9044-876B-883B54F8677D}" type="slidenum">
+              <a:rPr/>
+              <a:t>3</a:t>
+            </a:fld>
+            <a:endParaRPr/>
           </a:p>
         </p:txBody>
       </p:sp>
@@ -3797,12 +3877,12 @@
   <p:clrMapOvr>
     <a:masterClrMapping/>
   </p:clrMapOvr>
-  <p:transition xmlns:p14="http://schemas.microsoft.com/office/powerpoint/2010/main" spd="med" advClick="1"/>
+  <p:transition spd="med"/>
 </p:sld>
 </file>
 
-<file path=ppt/slides/slide5.xml><?xml version="1.0" encoding="utf-8"?>
-<p:sld xmlns:a="http://schemas.openxmlformats.org/drawingml/2006/main" xmlns:r="http://schemas.openxmlformats.org/officeDocument/2006/relationships" xmlns:p="http://schemas.openxmlformats.org/presentationml/2006/main" xmlns:m="http://schemas.openxmlformats.org/officeDocument/2006/math" xmlns:a14="http://schemas.microsoft.com/office/drawing/2010/main" showMasterSp="1" showMasterPhAnim="1">
+<file path=ppt/slides/slide4.xml><?xml version="1.0" encoding="utf-8"?>
+<p:sld xmlns:a="http://schemas.openxmlformats.org/drawingml/2006/main" xmlns:r="http://schemas.openxmlformats.org/officeDocument/2006/relationships" xmlns:p="http://schemas.openxmlformats.org/presentationml/2006/main">
   <p:cSld>
     <p:spTree>
       <p:nvGrpSpPr>
@@ -3821,7 +3901,9 @@
       <p:sp>
         <p:nvSpPr>
           <p:cNvPr id="154" name="Search strategies"/>
-          <p:cNvSpPr txBox="1"/>
+          <p:cNvSpPr txBox="1">
+            <a:spLocks noGrp="1"/>
+          </p:cNvSpPr>
           <p:nvPr>
             <p:ph type="title"/>
           </p:nvPr>
@@ -3835,7 +3917,6 @@
           <a:bodyPr/>
           <a:lstStyle/>
           <a:p>
-            <a:pPr/>
             <a:r>
               <a:t>Search strategies</a:t>
             </a:r>
@@ -3845,7 +3926,9 @@
       <p:sp>
         <p:nvSpPr>
           <p:cNvPr id="155" name="Consider alternative names, e.g. coronavirus main protease and 3c-like protease.…"/>
-          <p:cNvSpPr txBox="1"/>
+          <p:cNvSpPr txBox="1">
+            <a:spLocks noGrp="1"/>
+          </p:cNvSpPr>
           <p:nvPr>
             <p:ph type="body" idx="1"/>
           </p:nvPr>
@@ -3859,19 +3942,16 @@
           <a:bodyPr/>
           <a:lstStyle/>
           <a:p>
-            <a:pPr/>
             <a:r>
               <a:t>Consider alternative names, e.g. coronavirus main protease and 3c-like protease.</a:t>
             </a:r>
           </a:p>
           <a:p>
-            <a:pPr/>
             <a:r>
               <a:t>Proteins from different species are usually similar</a:t>
             </a:r>
           </a:p>
           <a:p>
-            <a:pPr/>
             <a:r>
               <a:t>Look at citations</a:t>
             </a:r>
@@ -3889,7 +3969,6 @@
             </a:r>
           </a:p>
           <a:p>
-            <a:pPr/>
             <a:r>
               <a:t>A research group will often work on similar proteins</a:t>
             </a:r>
@@ -3899,7 +3978,9 @@
       <p:sp>
         <p:nvSpPr>
           <p:cNvPr id="156" name="Slide Number"/>
-          <p:cNvSpPr txBox="1"/>
+          <p:cNvSpPr txBox="1">
+            <a:spLocks noGrp="1"/>
+          </p:cNvSpPr>
           <p:nvPr>
             <p:ph type="sldNum" sz="quarter" idx="2"/>
           </p:nvPr>
@@ -3914,7 +3995,7 @@
           </a:prstGeom>
           <a:extLst>
             <a:ext uri="{C572A759-6A51-4108-AA02-DFA0A04FC94B}">
-              <ma14:wrappingTextBoxFlag xmlns:ma14="http://schemas.microsoft.com/office/mac/drawingml/2011/main" val="1"/>
+              <ma14:wrappingTextBoxFlag xmlns="" xmlns:m="http://schemas.openxmlformats.org/officeDocument/2006/math" xmlns:a14="http://schemas.microsoft.com/office/drawing/2010/main" xmlns:ma14="http://schemas.microsoft.com/office/mac/drawingml/2011/main" val="1"/>
             </a:ext>
           </a:extLst>
         </p:spPr>
@@ -3922,8 +4003,11 @@
           <a:bodyPr/>
           <a:lstStyle/>
           <a:p>
-            <a:pPr/>
-            <a:fld id="{86CB4B4D-7CA3-9044-876B-883B54F8677D}" type="slidenum"/>
+            <a:fld id="{86CB4B4D-7CA3-9044-876B-883B54F8677D}" type="slidenum">
+              <a:rPr/>
+              <a:t>4</a:t>
+            </a:fld>
+            <a:endParaRPr/>
           </a:p>
         </p:txBody>
       </p:sp>
@@ -3932,14 +4016,14 @@
   <p:clrMapOvr>
     <a:masterClrMapping/>
   </p:clrMapOvr>
-  <p:transition xmlns:p14="http://schemas.microsoft.com/office/powerpoint/2010/main" spd="med" advClick="1"/>
+  <p:transition spd="med"/>
   <p:timing>
     <p:tnLst>
       <p:par>
-        <p:cTn id="1" nodeType="tmRoot" restart="never" dur="indefinite" fill="hold">
+        <p:cTn id="1" dur="indefinite" restart="never" fill="hold" nodeType="tmRoot">
           <p:childTnLst>
             <p:seq concurrent="1" prevAc="none" nextAc="seek">
-              <p:cTn id="2" nodeType="mainSeq" dur="indefinite" fill="hold">
+              <p:cTn id="2" dur="indefinite" fill="hold" nodeType="mainSeq">
                 <p:childTnLst>
                   <p:par>
                     <p:cTn id="3" fill="hold">
@@ -3954,11 +4038,11 @@
                             </p:stCondLst>
                             <p:childTnLst>
                               <p:par>
-                                <p:cTn id="5" presetClass="entr" nodeType="clickEffect" presetSubtype="0" presetID="1" grpId="1" fill="hold">
+                                <p:cTn id="5" presetID="1" presetClass="entr" presetSubtype="0" fill="hold" grpId="1" nodeType="clickEffect">
                                   <p:stCondLst>
                                     <p:cond delay="0"/>
                                   </p:stCondLst>
-                                  <p:iterate type="el" backwards="0">
+                                  <p:iterate>
                                     <p:tmAbs val="0"/>
                                   </p:iterate>
                                   <p:childTnLst>
@@ -3982,11 +4066,11 @@
                                 </p:cTn>
                               </p:par>
                               <p:par>
-                                <p:cTn id="7" presetClass="entr" nodeType="withEffect" presetSubtype="0" presetID="1" grpId="1" fill="hold">
+                                <p:cTn id="7" presetID="1" presetClass="entr" presetSubtype="0" fill="hold" grpId="1" nodeType="withEffect">
                                   <p:stCondLst>
                                     <p:cond delay="0"/>
                                   </p:stCondLst>
-                                  <p:iterate type="el" backwards="0">
+                                  <p:iterate>
                                     <p:tmAbs val="0"/>
                                   </p:iterate>
                                   <p:childTnLst>
@@ -4030,11 +4114,11 @@
                             </p:stCondLst>
                             <p:childTnLst>
                               <p:par>
-                                <p:cTn id="11" presetClass="entr" nodeType="clickEffect" presetSubtype="0" presetID="1" grpId="1" fill="hold">
+                                <p:cTn id="11" presetID="1" presetClass="entr" presetSubtype="0" fill="hold" grpId="1" nodeType="clickEffect">
                                   <p:stCondLst>
                                     <p:cond delay="0"/>
                                   </p:stCondLst>
-                                  <p:iterate type="el" backwards="0">
+                                  <p:iterate>
                                     <p:tmAbs val="0"/>
                                   </p:iterate>
                                   <p:childTnLst>
@@ -4078,11 +4162,11 @@
                             </p:stCondLst>
                             <p:childTnLst>
                               <p:par>
-                                <p:cTn id="15" presetClass="entr" nodeType="clickEffect" presetSubtype="0" presetID="1" grpId="1" fill="hold">
+                                <p:cTn id="15" presetID="1" presetClass="entr" presetSubtype="0" fill="hold" grpId="1" nodeType="clickEffect">
                                   <p:stCondLst>
                                     <p:cond delay="0"/>
                                   </p:stCondLst>
-                                  <p:iterate type="el" backwards="0">
+                                  <p:iterate>
                                     <p:tmAbs val="0"/>
                                   </p:iterate>
                                   <p:childTnLst>
@@ -4108,11 +4192,11 @@
                                 </p:cTn>
                               </p:par>
                               <p:par>
-                                <p:cTn id="17" presetClass="entr" nodeType="withEffect" presetSubtype="0" presetID="1" grpId="1" fill="hold">
+                                <p:cTn id="17" presetID="1" presetClass="entr" presetSubtype="0" fill="hold" grpId="1" nodeType="withEffect">
                                   <p:stCondLst>
                                     <p:cond delay="0"/>
                                   </p:stCondLst>
-                                  <p:iterate type="el" backwards="0">
+                                  <p:iterate>
                                     <p:tmAbs val="0"/>
                                   </p:iterate>
                                   <p:childTnLst>
@@ -4138,11 +4222,11 @@
                                 </p:cTn>
                               </p:par>
                               <p:par>
-                                <p:cTn id="19" presetClass="entr" nodeType="withEffect" presetSubtype="0" presetID="1" grpId="1" fill="hold">
+                                <p:cTn id="19" presetID="1" presetClass="entr" presetSubtype="0" fill="hold" grpId="1" nodeType="withEffect">
                                   <p:stCondLst>
                                     <p:cond delay="0"/>
                                   </p:stCondLst>
-                                  <p:iterate type="el" backwards="0">
+                                  <p:iterate>
                                     <p:tmAbs val="0"/>
                                   </p:iterate>
                                   <p:childTnLst>
@@ -4186,11 +4270,11 @@
                             </p:stCondLst>
                             <p:childTnLst>
                               <p:par>
-                                <p:cTn id="23" presetClass="entr" nodeType="clickEffect" presetSubtype="0" presetID="1" grpId="1" fill="hold">
+                                <p:cTn id="23" presetID="1" presetClass="entr" presetSubtype="0" fill="hold" grpId="1" nodeType="clickEffect">
                                   <p:stCondLst>
                                     <p:cond delay="0"/>
                                   </p:stCondLst>
-                                  <p:iterate type="el" backwards="0">
+                                  <p:iterate>
                                     <p:tmAbs val="0"/>
                                   </p:iterate>
                                   <p:childTnLst>
@@ -4224,14 +4308,14 @@
                 </p:childTnLst>
               </p:cTn>
               <p:prevCondLst>
-                <p:cond evt="onPrev">
+                <p:cond evt="onPrev" delay="0">
                   <p:tgtEl>
                     <p:sldTgt/>
                   </p:tgtEl>
                 </p:cond>
               </p:prevCondLst>
               <p:nextCondLst>
-                <p:cond evt="onNext">
+                <p:cond evt="onNext" delay="0">
                   <p:tgtEl>
                     <p:sldTgt/>
                   </p:tgtEl>
@@ -4243,14 +4327,14 @@
       </p:par>
     </p:tnLst>
     <p:bldLst>
-      <p:bldP build="p" bldLvl="1" animBg="1" rev="0" advAuto="0" spid="155" grpId="1"/>
+      <p:bldP spid="155" grpId="1" build="p" animBg="1" advAuto="0"/>
     </p:bldLst>
   </p:timing>
 </p:sld>
 </file>
 
-<file path=ppt/slides/slide6.xml><?xml version="1.0" encoding="utf-8"?>
-<p:sld xmlns:a="http://schemas.openxmlformats.org/drawingml/2006/main" xmlns:r="http://schemas.openxmlformats.org/officeDocument/2006/relationships" xmlns:p="http://schemas.openxmlformats.org/presentationml/2006/main" xmlns:m="http://schemas.openxmlformats.org/officeDocument/2006/math" xmlns:a14="http://schemas.microsoft.com/office/drawing/2010/main" showMasterSp="1" showMasterPhAnim="1">
+<file path=ppt/slides/slide5.xml><?xml version="1.0" encoding="utf-8"?>
+<p:sld xmlns:a="http://schemas.openxmlformats.org/drawingml/2006/main" xmlns:r="http://schemas.openxmlformats.org/officeDocument/2006/relationships" xmlns:p="http://schemas.openxmlformats.org/presentationml/2006/main">
   <p:cSld>
     <p:spTree>
       <p:nvGrpSpPr>
@@ -4269,7 +4353,9 @@
       <p:sp>
         <p:nvSpPr>
           <p:cNvPr id="158" name="Zotero"/>
-          <p:cNvSpPr txBox="1"/>
+          <p:cNvSpPr txBox="1">
+            <a:spLocks noGrp="1"/>
+          </p:cNvSpPr>
           <p:nvPr>
             <p:ph type="title"/>
           </p:nvPr>
@@ -4283,7 +4369,6 @@
           <a:bodyPr/>
           <a:lstStyle/>
           <a:p>
-            <a:pPr/>
             <a:r>
               <a:t>Zotero</a:t>
             </a:r>
@@ -4293,7 +4378,9 @@
       <p:sp>
         <p:nvSpPr>
           <p:cNvPr id="159" name="Open source and free…"/>
-          <p:cNvSpPr txBox="1"/>
+          <p:cNvSpPr txBox="1">
+            <a:spLocks noGrp="1"/>
+          </p:cNvSpPr>
           <p:nvPr>
             <p:ph type="body" idx="1"/>
           </p:nvPr>
@@ -4307,31 +4394,26 @@
           <a:bodyPr/>
           <a:lstStyle/>
           <a:p>
-            <a:pPr/>
             <a:r>
               <a:t>Open source and free</a:t>
             </a:r>
           </a:p>
           <a:p>
-            <a:pPr/>
             <a:r>
               <a:t>Available online and as an application</a:t>
             </a:r>
           </a:p>
           <a:p>
-            <a:pPr/>
             <a:r>
               <a:t>Automatically organizes manuscript files &amp; notes</a:t>
             </a:r>
           </a:p>
           <a:p>
-            <a:pPr/>
             <a:r>
               <a:t>Allows sharing with others via group libraries</a:t>
             </a:r>
           </a:p>
           <a:p>
-            <a:pPr/>
             <a:r>
               <a:t>Creates bibliographies</a:t>
             </a:r>
@@ -4353,7 +4435,9 @@
       <p:sp>
         <p:nvSpPr>
           <p:cNvPr id="160" name="Slide Number"/>
-          <p:cNvSpPr txBox="1"/>
+          <p:cNvSpPr txBox="1">
+            <a:spLocks noGrp="1"/>
+          </p:cNvSpPr>
           <p:nvPr>
             <p:ph type="sldNum" sz="quarter" idx="2"/>
           </p:nvPr>
@@ -4368,7 +4452,7 @@
           </a:prstGeom>
           <a:extLst>
             <a:ext uri="{C572A759-6A51-4108-AA02-DFA0A04FC94B}">
-              <ma14:wrappingTextBoxFlag xmlns:ma14="http://schemas.microsoft.com/office/mac/drawingml/2011/main" val="1"/>
+              <ma14:wrappingTextBoxFlag xmlns="" xmlns:m="http://schemas.openxmlformats.org/officeDocument/2006/math" xmlns:a14="http://schemas.microsoft.com/office/drawing/2010/main" xmlns:ma14="http://schemas.microsoft.com/office/mac/drawingml/2011/main" val="1"/>
             </a:ext>
           </a:extLst>
         </p:spPr>
@@ -4376,8 +4460,11 @@
           <a:bodyPr/>
           <a:lstStyle/>
           <a:p>
-            <a:pPr/>
-            <a:fld id="{86CB4B4D-7CA3-9044-876B-883B54F8677D}" type="slidenum"/>
+            <a:fld id="{86CB4B4D-7CA3-9044-876B-883B54F8677D}" type="slidenum">
+              <a:rPr/>
+              <a:t>5</a:t>
+            </a:fld>
+            <a:endParaRPr/>
           </a:p>
         </p:txBody>
       </p:sp>
@@ -4386,12 +4473,12 @@
   <p:clrMapOvr>
     <a:masterClrMapping/>
   </p:clrMapOvr>
-  <p:transition xmlns:p14="http://schemas.microsoft.com/office/powerpoint/2010/main" spd="med" advClick="1"/>
+  <p:transition spd="med"/>
 </p:sld>
 </file>
 
 <file path=ppt/theme/theme1.xml><?xml version="1.0" encoding="utf-8"?>
-<a:theme xmlns:a="http://schemas.openxmlformats.org/drawingml/2006/main" xmlns:r="http://schemas.openxmlformats.org/officeDocument/2006/relationships" name="White">
+<a:theme xmlns:a="http://schemas.openxmlformats.org/drawingml/2006/main" name="White">
   <a:themeElements>
     <a:clrScheme name="White">
       <a:dk1>
@@ -4517,7 +4604,7 @@
       <a:effectStyleLst>
         <a:effectStyle>
           <a:effectLst>
-            <a:outerShdw sx="100000" sy="100000" kx="0" ky="0" algn="b" rotWithShape="0" blurRad="50800" dist="25400" dir="5400000">
+            <a:outerShdw blurRad="50800" dist="25400" dir="5400000" rotWithShape="0">
               <a:srgbClr val="000000">
                 <a:alpha val="50000"/>
               </a:srgbClr>
@@ -4526,7 +4613,7 @@
         </a:effectStyle>
         <a:effectStyle>
           <a:effectLst>
-            <a:outerShdw sx="100000" sy="100000" kx="0" ky="0" algn="b" rotWithShape="0" blurRad="63500" dist="12700" dir="0">
+            <a:outerShdw blurRad="63500" dist="12700" rotWithShape="0">
               <a:srgbClr val="000000">
                 <a:alpha val="50000"/>
               </a:srgbClr>
@@ -4535,7 +4622,7 @@
         </a:effectStyle>
         <a:effectStyle>
           <a:effectLst>
-            <a:outerShdw sx="100000" sy="100000" kx="0" ky="0" algn="b" rotWithShape="0" blurRad="50800" dist="25400" dir="5400000">
+            <a:outerShdw blurRad="50800" dist="25400" dir="5400000" rotWithShape="0">
               <a:srgbClr val="000000">
                 <a:alpha val="50000"/>
               </a:srgbClr>
@@ -4599,8 +4686,8 @@
     <a:spDef>
       <a:spPr>
         <a:blipFill rotWithShape="1">
-          <a:blip r:embed="rId1"/>
-          <a:srcRect l="0" t="0" r="0" b="0"/>
+          <a:blip xmlns:r="http://schemas.openxmlformats.org/officeDocument/2006/relationships" r:embed="rId1"/>
+          <a:srcRect/>
           <a:tile tx="0" ty="0" sx="100000" sy="100000" flip="none" algn="tl"/>
         </a:blipFill>
         <a:ln w="12700" cap="flat">
@@ -4608,7 +4695,7 @@
           <a:miter lim="400000"/>
         </a:ln>
         <a:effectLst>
-          <a:outerShdw sx="100000" sy="100000" kx="0" ky="0" algn="b" rotWithShape="0" blurRad="50800" dist="25400" dir="5400000">
+          <a:outerShdw blurRad="50800" dist="25400" dir="5400000" rotWithShape="0">
             <a:srgbClr val="000000">
               <a:alpha val="50000"/>
             </a:srgbClr>
@@ -4616,7 +4703,7 @@
         </a:effectLst>
         <a:sp3d/>
       </a:spPr>
-      <a:bodyPr rot="0" spcFirstLastPara="1" vertOverflow="overflow" horzOverflow="overflow" vert="horz" wrap="square" lIns="71437" tIns="71437" rIns="71437" bIns="71437" numCol="1" spcCol="38100" rtlCol="0" anchor="ctr" upright="0">
+      <a:bodyPr rot="0" spcFirstLastPara="1" vertOverflow="overflow" horzOverflow="overflow" vert="horz" wrap="square" lIns="71437" tIns="71437" rIns="71437" bIns="71437" numCol="1" spcCol="38100" rtlCol="0" anchor="ctr">
         <a:spAutoFit/>
       </a:bodyPr>
       <a:lstStyle>
@@ -4635,7 +4722,7 @@
           <a:buFontTx/>
           <a:buNone/>
           <a:tabLst/>
-          <a:defRPr b="0" baseline="0" cap="none" i="0" spc="0" strike="noStrike" sz="2400" u="none" kumimoji="0" normalizeH="0">
+          <a:defRPr kumimoji="0" sz="2400" b="0" i="0" u="none" strike="noStrike" cap="none" spc="0" normalizeH="0" baseline="0">
             <a:ln>
               <a:noFill/>
             </a:ln>
@@ -4665,7 +4752,7 @@
           <a:buFontTx/>
           <a:buNone/>
           <a:tabLst/>
-          <a:defRPr b="0" baseline="0" cap="none" i="0" spc="0" strike="noStrike" sz="1800" u="none" kumimoji="0" normalizeH="0">
+          <a:defRPr kumimoji="0" sz="1800" b="0" i="0" u="none" strike="noStrike" cap="none" spc="0" normalizeH="0" baseline="0">
             <a:ln>
               <a:noFill/>
             </a:ln>
@@ -4691,7 +4778,7 @@
           <a:buFontTx/>
           <a:buNone/>
           <a:tabLst/>
-          <a:defRPr b="0" baseline="0" cap="none" i="0" spc="0" strike="noStrike" sz="1800" u="none" kumimoji="0" normalizeH="0">
+          <a:defRPr kumimoji="0" sz="1800" b="0" i="0" u="none" strike="noStrike" cap="none" spc="0" normalizeH="0" baseline="0">
             <a:ln>
               <a:noFill/>
             </a:ln>
@@ -4717,7 +4804,7 @@
           <a:buFontTx/>
           <a:buNone/>
           <a:tabLst/>
-          <a:defRPr b="0" baseline="0" cap="none" i="0" spc="0" strike="noStrike" sz="1800" u="none" kumimoji="0" normalizeH="0">
+          <a:defRPr kumimoji="0" sz="1800" b="0" i="0" u="none" strike="noStrike" cap="none" spc="0" normalizeH="0" baseline="0">
             <a:ln>
               <a:noFill/>
             </a:ln>
@@ -4743,7 +4830,7 @@
           <a:buFontTx/>
           <a:buNone/>
           <a:tabLst/>
-          <a:defRPr b="0" baseline="0" cap="none" i="0" spc="0" strike="noStrike" sz="1800" u="none" kumimoji="0" normalizeH="0">
+          <a:defRPr kumimoji="0" sz="1800" b="0" i="0" u="none" strike="noStrike" cap="none" spc="0" normalizeH="0" baseline="0">
             <a:ln>
               <a:noFill/>
             </a:ln>
@@ -4769,7 +4856,7 @@
           <a:buFontTx/>
           <a:buNone/>
           <a:tabLst/>
-          <a:defRPr b="0" baseline="0" cap="none" i="0" spc="0" strike="noStrike" sz="1800" u="none" kumimoji="0" normalizeH="0">
+          <a:defRPr kumimoji="0" sz="1800" b="0" i="0" u="none" strike="noStrike" cap="none" spc="0" normalizeH="0" baseline="0">
             <a:ln>
               <a:noFill/>
             </a:ln>
@@ -4795,7 +4882,7 @@
           <a:buFontTx/>
           <a:buNone/>
           <a:tabLst/>
-          <a:defRPr b="0" baseline="0" cap="none" i="0" spc="0" strike="noStrike" sz="1800" u="none" kumimoji="0" normalizeH="0">
+          <a:defRPr kumimoji="0" sz="1800" b="0" i="0" u="none" strike="noStrike" cap="none" spc="0" normalizeH="0" baseline="0">
             <a:ln>
               <a:noFill/>
             </a:ln>
@@ -4821,7 +4908,7 @@
           <a:buFontTx/>
           <a:buNone/>
           <a:tabLst/>
-          <a:defRPr b="0" baseline="0" cap="none" i="0" spc="0" strike="noStrike" sz="1800" u="none" kumimoji="0" normalizeH="0">
+          <a:defRPr kumimoji="0" sz="1800" b="0" i="0" u="none" strike="noStrike" cap="none" spc="0" normalizeH="0" baseline="0">
             <a:ln>
               <a:noFill/>
             </a:ln>
@@ -4847,7 +4934,7 @@
           <a:buFontTx/>
           <a:buNone/>
           <a:tabLst/>
-          <a:defRPr b="0" baseline="0" cap="none" i="0" spc="0" strike="noStrike" sz="1800" u="none" kumimoji="0" normalizeH="0">
+          <a:defRPr kumimoji="0" sz="1800" b="0" i="0" u="none" strike="noStrike" cap="none" spc="0" normalizeH="0" baseline="0">
             <a:ln>
               <a:noFill/>
             </a:ln>
@@ -4873,7 +4960,7 @@
           <a:buFontTx/>
           <a:buNone/>
           <a:tabLst/>
-          <a:defRPr b="0" baseline="0" cap="none" i="0" spc="0" strike="noStrike" sz="1800" u="none" kumimoji="0" normalizeH="0">
+          <a:defRPr kumimoji="0" sz="1800" b="0" i="0" u="none" strike="noStrike" cap="none" spc="0" normalizeH="0" baseline="0">
             <a:ln>
               <a:noFill/>
             </a:ln>
@@ -4886,9 +4973,15 @@
         </a:lvl9pPr>
       </a:lstStyle>
       <a:style>
-        <a:lnRef idx="0"/>
-        <a:fillRef idx="0"/>
-        <a:effectRef idx="0"/>
+        <a:lnRef idx="0">
+          <a:scrgbClr r="0" g="0" b="0"/>
+        </a:lnRef>
+        <a:fillRef idx="0">
+          <a:scrgbClr r="0" g="0" b="0"/>
+        </a:fillRef>
+        <a:effectRef idx="0">
+          <a:scrgbClr r="0" g="0" b="0"/>
+        </a:effectRef>
         <a:fontRef idx="none"/>
       </a:style>
     </a:spDef>
@@ -4905,7 +4998,7 @@
         <a:effectLst/>
         <a:sp3d/>
       </a:spPr>
-      <a:bodyPr rot="0" spcFirstLastPara="1" vertOverflow="overflow" horzOverflow="overflow" vert="horz" wrap="square" lIns="91439" tIns="45719" rIns="91439" bIns="45719" numCol="1" spcCol="38100" rtlCol="0" anchor="t" upright="0">
+      <a:bodyPr rot="0" spcFirstLastPara="1" vertOverflow="overflow" horzOverflow="overflow" vert="horz" wrap="square" lIns="91439" tIns="45719" rIns="91439" bIns="45719" numCol="1" spcCol="38100" rtlCol="0" anchor="t">
         <a:noAutofit/>
       </a:bodyPr>
       <a:lstStyle>
@@ -4924,7 +5017,7 @@
           <a:buFontTx/>
           <a:buNone/>
           <a:tabLst/>
-          <a:defRPr b="0" baseline="0" cap="none" i="0" spc="0" strike="noStrike" sz="1800" u="none" kumimoji="0" normalizeH="0">
+          <a:defRPr kumimoji="0" sz="1800" b="0" i="0" u="none" strike="noStrike" cap="none" spc="0" normalizeH="0" baseline="0">
             <a:ln>
               <a:noFill/>
             </a:ln>
@@ -4950,7 +5043,7 @@
           <a:buFontTx/>
           <a:buNone/>
           <a:tabLst/>
-          <a:defRPr b="0" baseline="0" cap="none" i="0" spc="0" strike="noStrike" sz="1800" u="none" kumimoji="0" normalizeH="0">
+          <a:defRPr kumimoji="0" sz="1800" b="0" i="0" u="none" strike="noStrike" cap="none" spc="0" normalizeH="0" baseline="0">
             <a:ln>
               <a:noFill/>
             </a:ln>
@@ -4976,7 +5069,7 @@
           <a:buFontTx/>
           <a:buNone/>
           <a:tabLst/>
-          <a:defRPr b="0" baseline="0" cap="none" i="0" spc="0" strike="noStrike" sz="1800" u="none" kumimoji="0" normalizeH="0">
+          <a:defRPr kumimoji="0" sz="1800" b="0" i="0" u="none" strike="noStrike" cap="none" spc="0" normalizeH="0" baseline="0">
             <a:ln>
               <a:noFill/>
             </a:ln>
@@ -5002,7 +5095,7 @@
           <a:buFontTx/>
           <a:buNone/>
           <a:tabLst/>
-          <a:defRPr b="0" baseline="0" cap="none" i="0" spc="0" strike="noStrike" sz="1800" u="none" kumimoji="0" normalizeH="0">
+          <a:defRPr kumimoji="0" sz="1800" b="0" i="0" u="none" strike="noStrike" cap="none" spc="0" normalizeH="0" baseline="0">
             <a:ln>
               <a:noFill/>
             </a:ln>
@@ -5028,7 +5121,7 @@
           <a:buFontTx/>
           <a:buNone/>
           <a:tabLst/>
-          <a:defRPr b="0" baseline="0" cap="none" i="0" spc="0" strike="noStrike" sz="1800" u="none" kumimoji="0" normalizeH="0">
+          <a:defRPr kumimoji="0" sz="1800" b="0" i="0" u="none" strike="noStrike" cap="none" spc="0" normalizeH="0" baseline="0">
             <a:ln>
               <a:noFill/>
             </a:ln>
@@ -5054,7 +5147,7 @@
           <a:buFontTx/>
           <a:buNone/>
           <a:tabLst/>
-          <a:defRPr b="0" baseline="0" cap="none" i="0" spc="0" strike="noStrike" sz="1800" u="none" kumimoji="0" normalizeH="0">
+          <a:defRPr kumimoji="0" sz="1800" b="0" i="0" u="none" strike="noStrike" cap="none" spc="0" normalizeH="0" baseline="0">
             <a:ln>
               <a:noFill/>
             </a:ln>
@@ -5080,7 +5173,7 @@
           <a:buFontTx/>
           <a:buNone/>
           <a:tabLst/>
-          <a:defRPr b="0" baseline="0" cap="none" i="0" spc="0" strike="noStrike" sz="1800" u="none" kumimoji="0" normalizeH="0">
+          <a:defRPr kumimoji="0" sz="1800" b="0" i="0" u="none" strike="noStrike" cap="none" spc="0" normalizeH="0" baseline="0">
             <a:ln>
               <a:noFill/>
             </a:ln>
@@ -5106,7 +5199,7 @@
           <a:buFontTx/>
           <a:buNone/>
           <a:tabLst/>
-          <a:defRPr b="0" baseline="0" cap="none" i="0" spc="0" strike="noStrike" sz="1800" u="none" kumimoji="0" normalizeH="0">
+          <a:defRPr kumimoji="0" sz="1800" b="0" i="0" u="none" strike="noStrike" cap="none" spc="0" normalizeH="0" baseline="0">
             <a:ln>
               <a:noFill/>
             </a:ln>
@@ -5132,7 +5225,7 @@
           <a:buFontTx/>
           <a:buNone/>
           <a:tabLst/>
-          <a:defRPr b="0" baseline="0" cap="none" i="0" spc="0" strike="noStrike" sz="1800" u="none" kumimoji="0" normalizeH="0">
+          <a:defRPr kumimoji="0" sz="1800" b="0" i="0" u="none" strike="noStrike" cap="none" spc="0" normalizeH="0" baseline="0">
             <a:ln>
               <a:noFill/>
             </a:ln>
@@ -5158,7 +5251,7 @@
           <a:buFontTx/>
           <a:buNone/>
           <a:tabLst/>
-          <a:defRPr b="0" baseline="0" cap="none" i="0" spc="0" strike="noStrike" sz="1800" u="none" kumimoji="0" normalizeH="0">
+          <a:defRPr kumimoji="0" sz="1800" b="0" i="0" u="none" strike="noStrike" cap="none" spc="0" normalizeH="0" baseline="0">
             <a:ln>
               <a:noFill/>
             </a:ln>
@@ -5171,9 +5264,15 @@
         </a:lvl9pPr>
       </a:lstStyle>
       <a:style>
-        <a:lnRef idx="0"/>
-        <a:fillRef idx="0"/>
-        <a:effectRef idx="0"/>
+        <a:lnRef idx="0">
+          <a:scrgbClr r="0" g="0" b="0"/>
+        </a:lnRef>
+        <a:fillRef idx="0">
+          <a:scrgbClr r="0" g="0" b="0"/>
+        </a:fillRef>
+        <a:effectRef idx="0">
+          <a:scrgbClr r="0" g="0" b="0"/>
+        </a:effectRef>
         <a:fontRef idx="none"/>
       </a:style>
     </a:lnDef>
@@ -5187,7 +5286,7 @@
         <a:effectLst/>
         <a:sp3d/>
       </a:spPr>
-      <a:bodyPr rot="0" spcFirstLastPara="1" vertOverflow="overflow" horzOverflow="overflow" vert="horz" wrap="square" lIns="71437" tIns="71437" rIns="71437" bIns="71437" numCol="1" spcCol="38100" rtlCol="0" anchor="ctr" upright="0">
+      <a:bodyPr rot="0" spcFirstLastPara="1" vertOverflow="overflow" horzOverflow="overflow" vert="horz" wrap="square" lIns="71437" tIns="71437" rIns="71437" bIns="71437" numCol="1" spcCol="38100" rtlCol="0" anchor="ctr">
         <a:spAutoFit/>
       </a:bodyPr>
       <a:lstStyle>
@@ -5206,7 +5305,7 @@
           <a:buFontTx/>
           <a:buNone/>
           <a:tabLst/>
-          <a:defRPr b="0" baseline="0" cap="none" i="0" spc="0" strike="noStrike" sz="3200" u="none" kumimoji="0" normalizeH="0">
+          <a:defRPr kumimoji="0" sz="3200" b="0" i="0" u="none" strike="noStrike" cap="none" spc="0" normalizeH="0" baseline="0">
             <a:ln>
               <a:noFill/>
             </a:ln>
@@ -5236,7 +5335,7 @@
           <a:buFontTx/>
           <a:buNone/>
           <a:tabLst/>
-          <a:defRPr b="0" baseline="0" cap="none" i="0" spc="0" strike="noStrike" sz="1800" u="none" kumimoji="0" normalizeH="0">
+          <a:defRPr kumimoji="0" sz="1800" b="0" i="0" u="none" strike="noStrike" cap="none" spc="0" normalizeH="0" baseline="0">
             <a:ln>
               <a:noFill/>
             </a:ln>
@@ -5262,7 +5361,7 @@
           <a:buFontTx/>
           <a:buNone/>
           <a:tabLst/>
-          <a:defRPr b="0" baseline="0" cap="none" i="0" spc="0" strike="noStrike" sz="1800" u="none" kumimoji="0" normalizeH="0">
+          <a:defRPr kumimoji="0" sz="1800" b="0" i="0" u="none" strike="noStrike" cap="none" spc="0" normalizeH="0" baseline="0">
             <a:ln>
               <a:noFill/>
             </a:ln>
@@ -5288,7 +5387,7 @@
           <a:buFontTx/>
           <a:buNone/>
           <a:tabLst/>
-          <a:defRPr b="0" baseline="0" cap="none" i="0" spc="0" strike="noStrike" sz="1800" u="none" kumimoji="0" normalizeH="0">
+          <a:defRPr kumimoji="0" sz="1800" b="0" i="0" u="none" strike="noStrike" cap="none" spc="0" normalizeH="0" baseline="0">
             <a:ln>
               <a:noFill/>
             </a:ln>
@@ -5314,7 +5413,7 @@
           <a:buFontTx/>
           <a:buNone/>
           <a:tabLst/>
-          <a:defRPr b="0" baseline="0" cap="none" i="0" spc="0" strike="noStrike" sz="1800" u="none" kumimoji="0" normalizeH="0">
+          <a:defRPr kumimoji="0" sz="1800" b="0" i="0" u="none" strike="noStrike" cap="none" spc="0" normalizeH="0" baseline="0">
             <a:ln>
               <a:noFill/>
             </a:ln>
@@ -5340,7 +5439,7 @@
           <a:buFontTx/>
           <a:buNone/>
           <a:tabLst/>
-          <a:defRPr b="0" baseline="0" cap="none" i="0" spc="0" strike="noStrike" sz="1800" u="none" kumimoji="0" normalizeH="0">
+          <a:defRPr kumimoji="0" sz="1800" b="0" i="0" u="none" strike="noStrike" cap="none" spc="0" normalizeH="0" baseline="0">
             <a:ln>
               <a:noFill/>
             </a:ln>
@@ -5366,7 +5465,7 @@
           <a:buFontTx/>
           <a:buNone/>
           <a:tabLst/>
-          <a:defRPr b="0" baseline="0" cap="none" i="0" spc="0" strike="noStrike" sz="1800" u="none" kumimoji="0" normalizeH="0">
+          <a:defRPr kumimoji="0" sz="1800" b="0" i="0" u="none" strike="noStrike" cap="none" spc="0" normalizeH="0" baseline="0">
             <a:ln>
               <a:noFill/>
             </a:ln>
@@ -5392,7 +5491,7 @@
           <a:buFontTx/>
           <a:buNone/>
           <a:tabLst/>
-          <a:defRPr b="0" baseline="0" cap="none" i="0" spc="0" strike="noStrike" sz="1800" u="none" kumimoji="0" normalizeH="0">
+          <a:defRPr kumimoji="0" sz="1800" b="0" i="0" u="none" strike="noStrike" cap="none" spc="0" normalizeH="0" baseline="0">
             <a:ln>
               <a:noFill/>
             </a:ln>
@@ -5418,7 +5517,7 @@
           <a:buFontTx/>
           <a:buNone/>
           <a:tabLst/>
-          <a:defRPr b="0" baseline="0" cap="none" i="0" spc="0" strike="noStrike" sz="1800" u="none" kumimoji="0" normalizeH="0">
+          <a:defRPr kumimoji="0" sz="1800" b="0" i="0" u="none" strike="noStrike" cap="none" spc="0" normalizeH="0" baseline="0">
             <a:ln>
               <a:noFill/>
             </a:ln>
@@ -5444,7 +5543,7 @@
           <a:buFontTx/>
           <a:buNone/>
           <a:tabLst/>
-          <a:defRPr b="0" baseline="0" cap="none" i="0" spc="0" strike="noStrike" sz="1800" u="none" kumimoji="0" normalizeH="0">
+          <a:defRPr kumimoji="0" sz="1800" b="0" i="0" u="none" strike="noStrike" cap="none" spc="0" normalizeH="0" baseline="0">
             <a:ln>
               <a:noFill/>
             </a:ln>
@@ -5457,18 +5556,25 @@
         </a:lvl9pPr>
       </a:lstStyle>
       <a:style>
-        <a:lnRef idx="0"/>
-        <a:fillRef idx="0"/>
-        <a:effectRef idx="0"/>
+        <a:lnRef idx="0">
+          <a:scrgbClr r="0" g="0" b="0"/>
+        </a:lnRef>
+        <a:fillRef idx="0">
+          <a:scrgbClr r="0" g="0" b="0"/>
+        </a:fillRef>
+        <a:effectRef idx="0">
+          <a:scrgbClr r="0" g="0" b="0"/>
+        </a:effectRef>
         <a:fontRef idx="none"/>
       </a:style>
     </a:txDef>
   </a:objectDefaults>
+  <a:extraClrSchemeLst/>
 </a:theme>
 </file>
 
 <file path=ppt/theme/theme2.xml><?xml version="1.0" encoding="utf-8"?>
-<a:theme xmlns:a="http://schemas.openxmlformats.org/drawingml/2006/main" xmlns:r="http://schemas.openxmlformats.org/officeDocument/2006/relationships" name="White">
+<a:theme xmlns:a="http://schemas.openxmlformats.org/drawingml/2006/main" name="White">
   <a:themeElements>
     <a:clrScheme name="White">
       <a:dk1>
@@ -5594,7 +5700,7 @@
       <a:effectStyleLst>
         <a:effectStyle>
           <a:effectLst>
-            <a:outerShdw sx="100000" sy="100000" kx="0" ky="0" algn="b" rotWithShape="0" blurRad="50800" dist="25400" dir="5400000">
+            <a:outerShdw blurRad="50800" dist="25400" dir="5400000" rotWithShape="0">
               <a:srgbClr val="000000">
                 <a:alpha val="50000"/>
               </a:srgbClr>
@@ -5603,7 +5709,7 @@
         </a:effectStyle>
         <a:effectStyle>
           <a:effectLst>
-            <a:outerShdw sx="100000" sy="100000" kx="0" ky="0" algn="b" rotWithShape="0" blurRad="63500" dist="12700" dir="0">
+            <a:outerShdw blurRad="63500" dist="12700" rotWithShape="0">
               <a:srgbClr val="000000">
                 <a:alpha val="50000"/>
               </a:srgbClr>
@@ -5612,7 +5718,7 @@
         </a:effectStyle>
         <a:effectStyle>
           <a:effectLst>
-            <a:outerShdw sx="100000" sy="100000" kx="0" ky="0" algn="b" rotWithShape="0" blurRad="50800" dist="25400" dir="5400000">
+            <a:outerShdw blurRad="50800" dist="25400" dir="5400000" rotWithShape="0">
               <a:srgbClr val="000000">
                 <a:alpha val="50000"/>
               </a:srgbClr>
@@ -5676,8 +5782,8 @@
     <a:spDef>
       <a:spPr>
         <a:blipFill rotWithShape="1">
-          <a:blip r:embed="rId1"/>
-          <a:srcRect l="0" t="0" r="0" b="0"/>
+          <a:blip xmlns:r="http://schemas.openxmlformats.org/officeDocument/2006/relationships" r:embed="rId1"/>
+          <a:srcRect/>
           <a:tile tx="0" ty="0" sx="100000" sy="100000" flip="none" algn="tl"/>
         </a:blipFill>
         <a:ln w="12700" cap="flat">
@@ -5685,7 +5791,7 @@
           <a:miter lim="400000"/>
         </a:ln>
         <a:effectLst>
-          <a:outerShdw sx="100000" sy="100000" kx="0" ky="0" algn="b" rotWithShape="0" blurRad="50800" dist="25400" dir="5400000">
+          <a:outerShdw blurRad="50800" dist="25400" dir="5400000" rotWithShape="0">
             <a:srgbClr val="000000">
               <a:alpha val="50000"/>
             </a:srgbClr>
@@ -5693,7 +5799,7 @@
         </a:effectLst>
         <a:sp3d/>
       </a:spPr>
-      <a:bodyPr rot="0" spcFirstLastPara="1" vertOverflow="overflow" horzOverflow="overflow" vert="horz" wrap="square" lIns="71437" tIns="71437" rIns="71437" bIns="71437" numCol="1" spcCol="38100" rtlCol="0" anchor="ctr" upright="0">
+      <a:bodyPr rot="0" spcFirstLastPara="1" vertOverflow="overflow" horzOverflow="overflow" vert="horz" wrap="square" lIns="71437" tIns="71437" rIns="71437" bIns="71437" numCol="1" spcCol="38100" rtlCol="0" anchor="ctr">
         <a:spAutoFit/>
       </a:bodyPr>
       <a:lstStyle>
@@ -5712,7 +5818,7 @@
           <a:buFontTx/>
           <a:buNone/>
           <a:tabLst/>
-          <a:defRPr b="0" baseline="0" cap="none" i="0" spc="0" strike="noStrike" sz="2400" u="none" kumimoji="0" normalizeH="0">
+          <a:defRPr kumimoji="0" sz="2400" b="0" i="0" u="none" strike="noStrike" cap="none" spc="0" normalizeH="0" baseline="0">
             <a:ln>
               <a:noFill/>
             </a:ln>
@@ -5742,7 +5848,7 @@
           <a:buFontTx/>
           <a:buNone/>
           <a:tabLst/>
-          <a:defRPr b="0" baseline="0" cap="none" i="0" spc="0" strike="noStrike" sz="1800" u="none" kumimoji="0" normalizeH="0">
+          <a:defRPr kumimoji="0" sz="1800" b="0" i="0" u="none" strike="noStrike" cap="none" spc="0" normalizeH="0" baseline="0">
             <a:ln>
               <a:noFill/>
             </a:ln>
@@ -5768,7 +5874,7 @@
           <a:buFontTx/>
           <a:buNone/>
           <a:tabLst/>
-          <a:defRPr b="0" baseline="0" cap="none" i="0" spc="0" strike="noStrike" sz="1800" u="none" kumimoji="0" normalizeH="0">
+          <a:defRPr kumimoji="0" sz="1800" b="0" i="0" u="none" strike="noStrike" cap="none" spc="0" normalizeH="0" baseline="0">
             <a:ln>
               <a:noFill/>
             </a:ln>
@@ -5794,7 +5900,7 @@
           <a:buFontTx/>
           <a:buNone/>
           <a:tabLst/>
-          <a:defRPr b="0" baseline="0" cap="none" i="0" spc="0" strike="noStrike" sz="1800" u="none" kumimoji="0" normalizeH="0">
+          <a:defRPr kumimoji="0" sz="1800" b="0" i="0" u="none" strike="noStrike" cap="none" spc="0" normalizeH="0" baseline="0">
             <a:ln>
               <a:noFill/>
             </a:ln>
@@ -5820,7 +5926,7 @@
           <a:buFontTx/>
           <a:buNone/>
           <a:tabLst/>
-          <a:defRPr b="0" baseline="0" cap="none" i="0" spc="0" strike="noStrike" sz="1800" u="none" kumimoji="0" normalizeH="0">
+          <a:defRPr kumimoji="0" sz="1800" b="0" i="0" u="none" strike="noStrike" cap="none" spc="0" normalizeH="0" baseline="0">
             <a:ln>
               <a:noFill/>
             </a:ln>
@@ -5846,7 +5952,7 @@
           <a:buFontTx/>
           <a:buNone/>
           <a:tabLst/>
-          <a:defRPr b="0" baseline="0" cap="none" i="0" spc="0" strike="noStrike" sz="1800" u="none" kumimoji="0" normalizeH="0">
+          <a:defRPr kumimoji="0" sz="1800" b="0" i="0" u="none" strike="noStrike" cap="none" spc="0" normalizeH="0" baseline="0">
             <a:ln>
               <a:noFill/>
             </a:ln>
@@ -5872,7 +5978,7 @@
           <a:buFontTx/>
           <a:buNone/>
           <a:tabLst/>
-          <a:defRPr b="0" baseline="0" cap="none" i="0" spc="0" strike="noStrike" sz="1800" u="none" kumimoji="0" normalizeH="0">
+          <a:defRPr kumimoji="0" sz="1800" b="0" i="0" u="none" strike="noStrike" cap="none" spc="0" normalizeH="0" baseline="0">
             <a:ln>
               <a:noFill/>
             </a:ln>
@@ -5898,7 +6004,7 @@
           <a:buFontTx/>
           <a:buNone/>
           <a:tabLst/>
-          <a:defRPr b="0" baseline="0" cap="none" i="0" spc="0" strike="noStrike" sz="1800" u="none" kumimoji="0" normalizeH="0">
+          <a:defRPr kumimoji="0" sz="1800" b="0" i="0" u="none" strike="noStrike" cap="none" spc="0" normalizeH="0" baseline="0">
             <a:ln>
               <a:noFill/>
             </a:ln>
@@ -5924,7 +6030,7 @@
           <a:buFontTx/>
           <a:buNone/>
           <a:tabLst/>
-          <a:defRPr b="0" baseline="0" cap="none" i="0" spc="0" strike="noStrike" sz="1800" u="none" kumimoji="0" normalizeH="0">
+          <a:defRPr kumimoji="0" sz="1800" b="0" i="0" u="none" strike="noStrike" cap="none" spc="0" normalizeH="0" baseline="0">
             <a:ln>
               <a:noFill/>
             </a:ln>
@@ -5950,7 +6056,7 @@
           <a:buFontTx/>
           <a:buNone/>
           <a:tabLst/>
-          <a:defRPr b="0" baseline="0" cap="none" i="0" spc="0" strike="noStrike" sz="1800" u="none" kumimoji="0" normalizeH="0">
+          <a:defRPr kumimoji="0" sz="1800" b="0" i="0" u="none" strike="noStrike" cap="none" spc="0" normalizeH="0" baseline="0">
             <a:ln>
               <a:noFill/>
             </a:ln>
@@ -5963,9 +6069,15 @@
         </a:lvl9pPr>
       </a:lstStyle>
       <a:style>
-        <a:lnRef idx="0"/>
-        <a:fillRef idx="0"/>
-        <a:effectRef idx="0"/>
+        <a:lnRef idx="0">
+          <a:scrgbClr r="0" g="0" b="0"/>
+        </a:lnRef>
+        <a:fillRef idx="0">
+          <a:scrgbClr r="0" g="0" b="0"/>
+        </a:fillRef>
+        <a:effectRef idx="0">
+          <a:scrgbClr r="0" g="0" b="0"/>
+        </a:effectRef>
         <a:fontRef idx="none"/>
       </a:style>
     </a:spDef>
@@ -5982,7 +6094,7 @@
         <a:effectLst/>
         <a:sp3d/>
       </a:spPr>
-      <a:bodyPr rot="0" spcFirstLastPara="1" vertOverflow="overflow" horzOverflow="overflow" vert="horz" wrap="square" lIns="91439" tIns="45719" rIns="91439" bIns="45719" numCol="1" spcCol="38100" rtlCol="0" anchor="t" upright="0">
+      <a:bodyPr rot="0" spcFirstLastPara="1" vertOverflow="overflow" horzOverflow="overflow" vert="horz" wrap="square" lIns="91439" tIns="45719" rIns="91439" bIns="45719" numCol="1" spcCol="38100" rtlCol="0" anchor="t">
         <a:noAutofit/>
       </a:bodyPr>
       <a:lstStyle>
@@ -6001,7 +6113,7 @@
           <a:buFontTx/>
           <a:buNone/>
           <a:tabLst/>
-          <a:defRPr b="0" baseline="0" cap="none" i="0" spc="0" strike="noStrike" sz="1800" u="none" kumimoji="0" normalizeH="0">
+          <a:defRPr kumimoji="0" sz="1800" b="0" i="0" u="none" strike="noStrike" cap="none" spc="0" normalizeH="0" baseline="0">
             <a:ln>
               <a:noFill/>
             </a:ln>
@@ -6027,7 +6139,7 @@
           <a:buFontTx/>
           <a:buNone/>
           <a:tabLst/>
-          <a:defRPr b="0" baseline="0" cap="none" i="0" spc="0" strike="noStrike" sz="1800" u="none" kumimoji="0" normalizeH="0">
+          <a:defRPr kumimoji="0" sz="1800" b="0" i="0" u="none" strike="noStrike" cap="none" spc="0" normalizeH="0" baseline="0">
             <a:ln>
               <a:noFill/>
             </a:ln>
@@ -6053,7 +6165,7 @@
           <a:buFontTx/>
           <a:buNone/>
           <a:tabLst/>
-          <a:defRPr b="0" baseline="0" cap="none" i="0" spc="0" strike="noStrike" sz="1800" u="none" kumimoji="0" normalizeH="0">
+          <a:defRPr kumimoji="0" sz="1800" b="0" i="0" u="none" strike="noStrike" cap="none" spc="0" normalizeH="0" baseline="0">
             <a:ln>
               <a:noFill/>
             </a:ln>
@@ -6079,7 +6191,7 @@
           <a:buFontTx/>
           <a:buNone/>
           <a:tabLst/>
-          <a:defRPr b="0" baseline="0" cap="none" i="0" spc="0" strike="noStrike" sz="1800" u="none" kumimoji="0" normalizeH="0">
+          <a:defRPr kumimoji="0" sz="1800" b="0" i="0" u="none" strike="noStrike" cap="none" spc="0" normalizeH="0" baseline="0">
             <a:ln>
               <a:noFill/>
             </a:ln>
@@ -6105,7 +6217,7 @@
           <a:buFontTx/>
           <a:buNone/>
           <a:tabLst/>
-          <a:defRPr b="0" baseline="0" cap="none" i="0" spc="0" strike="noStrike" sz="1800" u="none" kumimoji="0" normalizeH="0">
+          <a:defRPr kumimoji="0" sz="1800" b="0" i="0" u="none" strike="noStrike" cap="none" spc="0" normalizeH="0" baseline="0">
             <a:ln>
               <a:noFill/>
             </a:ln>
@@ -6131,7 +6243,7 @@
           <a:buFontTx/>
           <a:buNone/>
           <a:tabLst/>
-          <a:defRPr b="0" baseline="0" cap="none" i="0" spc="0" strike="noStrike" sz="1800" u="none" kumimoji="0" normalizeH="0">
+          <a:defRPr kumimoji="0" sz="1800" b="0" i="0" u="none" strike="noStrike" cap="none" spc="0" normalizeH="0" baseline="0">
             <a:ln>
               <a:noFill/>
             </a:ln>
@@ -6157,7 +6269,7 @@
           <a:buFontTx/>
           <a:buNone/>
           <a:tabLst/>
-          <a:defRPr b="0" baseline="0" cap="none" i="0" spc="0" strike="noStrike" sz="1800" u="none" kumimoji="0" normalizeH="0">
+          <a:defRPr kumimoji="0" sz="1800" b="0" i="0" u="none" strike="noStrike" cap="none" spc="0" normalizeH="0" baseline="0">
             <a:ln>
               <a:noFill/>
             </a:ln>
@@ -6183,7 +6295,7 @@
           <a:buFontTx/>
           <a:buNone/>
           <a:tabLst/>
-          <a:defRPr b="0" baseline="0" cap="none" i="0" spc="0" strike="noStrike" sz="1800" u="none" kumimoji="0" normalizeH="0">
+          <a:defRPr kumimoji="0" sz="1800" b="0" i="0" u="none" strike="noStrike" cap="none" spc="0" normalizeH="0" baseline="0">
             <a:ln>
               <a:noFill/>
             </a:ln>
@@ -6209,7 +6321,7 @@
           <a:buFontTx/>
           <a:buNone/>
           <a:tabLst/>
-          <a:defRPr b="0" baseline="0" cap="none" i="0" spc="0" strike="noStrike" sz="1800" u="none" kumimoji="0" normalizeH="0">
+          <a:defRPr kumimoji="0" sz="1800" b="0" i="0" u="none" strike="noStrike" cap="none" spc="0" normalizeH="0" baseline="0">
             <a:ln>
               <a:noFill/>
             </a:ln>
@@ -6235,7 +6347,7 @@
           <a:buFontTx/>
           <a:buNone/>
           <a:tabLst/>
-          <a:defRPr b="0" baseline="0" cap="none" i="0" spc="0" strike="noStrike" sz="1800" u="none" kumimoji="0" normalizeH="0">
+          <a:defRPr kumimoji="0" sz="1800" b="0" i="0" u="none" strike="noStrike" cap="none" spc="0" normalizeH="0" baseline="0">
             <a:ln>
               <a:noFill/>
             </a:ln>
@@ -6248,9 +6360,15 @@
         </a:lvl9pPr>
       </a:lstStyle>
       <a:style>
-        <a:lnRef idx="0"/>
-        <a:fillRef idx="0"/>
-        <a:effectRef idx="0"/>
+        <a:lnRef idx="0">
+          <a:scrgbClr r="0" g="0" b="0"/>
+        </a:lnRef>
+        <a:fillRef idx="0">
+          <a:scrgbClr r="0" g="0" b="0"/>
+        </a:fillRef>
+        <a:effectRef idx="0">
+          <a:scrgbClr r="0" g="0" b="0"/>
+        </a:effectRef>
         <a:fontRef idx="none"/>
       </a:style>
     </a:lnDef>
@@ -6264,7 +6382,7 @@
         <a:effectLst/>
         <a:sp3d/>
       </a:spPr>
-      <a:bodyPr rot="0" spcFirstLastPara="1" vertOverflow="overflow" horzOverflow="overflow" vert="horz" wrap="square" lIns="71437" tIns="71437" rIns="71437" bIns="71437" numCol="1" spcCol="38100" rtlCol="0" anchor="ctr" upright="0">
+      <a:bodyPr rot="0" spcFirstLastPara="1" vertOverflow="overflow" horzOverflow="overflow" vert="horz" wrap="square" lIns="71437" tIns="71437" rIns="71437" bIns="71437" numCol="1" spcCol="38100" rtlCol="0" anchor="ctr">
         <a:spAutoFit/>
       </a:bodyPr>
       <a:lstStyle>
@@ -6283,7 +6401,7 @@
           <a:buFontTx/>
           <a:buNone/>
           <a:tabLst/>
-          <a:defRPr b="0" baseline="0" cap="none" i="0" spc="0" strike="noStrike" sz="3200" u="none" kumimoji="0" normalizeH="0">
+          <a:defRPr kumimoji="0" sz="3200" b="0" i="0" u="none" strike="noStrike" cap="none" spc="0" normalizeH="0" baseline="0">
             <a:ln>
               <a:noFill/>
             </a:ln>
@@ -6313,7 +6431,7 @@
           <a:buFontTx/>
           <a:buNone/>
           <a:tabLst/>
-          <a:defRPr b="0" baseline="0" cap="none" i="0" spc="0" strike="noStrike" sz="1800" u="none" kumimoji="0" normalizeH="0">
+          <a:defRPr kumimoji="0" sz="1800" b="0" i="0" u="none" strike="noStrike" cap="none" spc="0" normalizeH="0" baseline="0">
             <a:ln>
               <a:noFill/>
             </a:ln>
@@ -6339,7 +6457,7 @@
           <a:buFontTx/>
           <a:buNone/>
           <a:tabLst/>
-          <a:defRPr b="0" baseline="0" cap="none" i="0" spc="0" strike="noStrike" sz="1800" u="none" kumimoji="0" normalizeH="0">
+          <a:defRPr kumimoji="0" sz="1800" b="0" i="0" u="none" strike="noStrike" cap="none" spc="0" normalizeH="0" baseline="0">
             <a:ln>
               <a:noFill/>
             </a:ln>
@@ -6365,7 +6483,7 @@
           <a:buFontTx/>
           <a:buNone/>
           <a:tabLst/>
-          <a:defRPr b="0" baseline="0" cap="none" i="0" spc="0" strike="noStrike" sz="1800" u="none" kumimoji="0" normalizeH="0">
+          <a:defRPr kumimoji="0" sz="1800" b="0" i="0" u="none" strike="noStrike" cap="none" spc="0" normalizeH="0" baseline="0">
             <a:ln>
               <a:noFill/>
             </a:ln>
@@ -6391,7 +6509,7 @@
           <a:buFontTx/>
           <a:buNone/>
           <a:tabLst/>
-          <a:defRPr b="0" baseline="0" cap="none" i="0" spc="0" strike="noStrike" sz="1800" u="none" kumimoji="0" normalizeH="0">
+          <a:defRPr kumimoji="0" sz="1800" b="0" i="0" u="none" strike="noStrike" cap="none" spc="0" normalizeH="0" baseline="0">
             <a:ln>
               <a:noFill/>
             </a:ln>
@@ -6417,7 +6535,7 @@
           <a:buFontTx/>
           <a:buNone/>
           <a:tabLst/>
-          <a:defRPr b="0" baseline="0" cap="none" i="0" spc="0" strike="noStrike" sz="1800" u="none" kumimoji="0" normalizeH="0">
+          <a:defRPr kumimoji="0" sz="1800" b="0" i="0" u="none" strike="noStrike" cap="none" spc="0" normalizeH="0" baseline="0">
             <a:ln>
               <a:noFill/>
             </a:ln>
@@ -6443,7 +6561,7 @@
           <a:buFontTx/>
           <a:buNone/>
           <a:tabLst/>
-          <a:defRPr b="0" baseline="0" cap="none" i="0" spc="0" strike="noStrike" sz="1800" u="none" kumimoji="0" normalizeH="0">
+          <a:defRPr kumimoji="0" sz="1800" b="0" i="0" u="none" strike="noStrike" cap="none" spc="0" normalizeH="0" baseline="0">
             <a:ln>
               <a:noFill/>
             </a:ln>
@@ -6469,7 +6587,7 @@
           <a:buFontTx/>
           <a:buNone/>
           <a:tabLst/>
-          <a:defRPr b="0" baseline="0" cap="none" i="0" spc="0" strike="noStrike" sz="1800" u="none" kumimoji="0" normalizeH="0">
+          <a:defRPr kumimoji="0" sz="1800" b="0" i="0" u="none" strike="noStrike" cap="none" spc="0" normalizeH="0" baseline="0">
             <a:ln>
               <a:noFill/>
             </a:ln>
@@ -6495,7 +6613,7 @@
           <a:buFontTx/>
           <a:buNone/>
           <a:tabLst/>
-          <a:defRPr b="0" baseline="0" cap="none" i="0" spc="0" strike="noStrike" sz="1800" u="none" kumimoji="0" normalizeH="0">
+          <a:defRPr kumimoji="0" sz="1800" b="0" i="0" u="none" strike="noStrike" cap="none" spc="0" normalizeH="0" baseline="0">
             <a:ln>
               <a:noFill/>
             </a:ln>
@@ -6521,7 +6639,7 @@
           <a:buFontTx/>
           <a:buNone/>
           <a:tabLst/>
-          <a:defRPr b="0" baseline="0" cap="none" i="0" spc="0" strike="noStrike" sz="1800" u="none" kumimoji="0" normalizeH="0">
+          <a:defRPr kumimoji="0" sz="1800" b="0" i="0" u="none" strike="noStrike" cap="none" spc="0" normalizeH="0" baseline="0">
             <a:ln>
               <a:noFill/>
             </a:ln>
@@ -6534,12 +6652,19 @@
         </a:lvl9pPr>
       </a:lstStyle>
       <a:style>
-        <a:lnRef idx="0"/>
-        <a:fillRef idx="0"/>
-        <a:effectRef idx="0"/>
+        <a:lnRef idx="0">
+          <a:scrgbClr r="0" g="0" b="0"/>
+        </a:lnRef>
+        <a:fillRef idx="0">
+          <a:scrgbClr r="0" g="0" b="0"/>
+        </a:fillRef>
+        <a:effectRef idx="0">
+          <a:scrgbClr r="0" g="0" b="0"/>
+        </a:effectRef>
         <a:fontRef idx="none"/>
       </a:style>
     </a:txDef>
   </a:objectDefaults>
+  <a:extraClrSchemeLst/>
 </a:theme>
 </file>
--- a/slides/0204-Scientific_Literature.pptx
+++ b/slides/0204-Scientific_Literature.pptx
@@ -10,8 +10,8 @@
   <p:sldIdLst>
     <p:sldId id="256" r:id="rId2"/>
     <p:sldId id="258" r:id="rId3"/>
-    <p:sldId id="259" r:id="rId4"/>
-    <p:sldId id="260" r:id="rId5"/>
+    <p:sldId id="260" r:id="rId4"/>
+    <p:sldId id="259" r:id="rId5"/>
     <p:sldId id="261" r:id="rId6"/>
   </p:sldIdLst>
   <p:sldSz cx="24384000" cy="13716000"/>
@@ -2437,7 +2437,7 @@
           </a:ln>
           <a:extLst>
             <a:ext uri="{C572A759-6A51-4108-AA02-DFA0A04FC94B}">
-              <ma14:wrappingTextBoxFlag xmlns="" xmlns:m="http://schemas.openxmlformats.org/officeDocument/2006/math" xmlns:a14="http://schemas.microsoft.com/office/drawing/2010/main" xmlns:ma14="http://schemas.microsoft.com/office/mac/drawingml/2011/main" val="1"/>
+              <ma14:wrappingTextBoxFlag xmlns:ma14="http://schemas.microsoft.com/office/mac/drawingml/2011/main" xmlns:a14="http://schemas.microsoft.com/office/drawing/2010/main" xmlns:m="http://schemas.openxmlformats.org/officeDocument/2006/math" xmlns="" val="1"/>
             </a:ext>
           </a:extLst>
         </p:spPr>
@@ -2476,7 +2476,7 @@
           </a:ln>
           <a:extLst>
             <a:ext uri="{C572A759-6A51-4108-AA02-DFA0A04FC94B}">
-              <ma14:wrappingTextBoxFlag xmlns="" xmlns:m="http://schemas.openxmlformats.org/officeDocument/2006/math" xmlns:a14="http://schemas.microsoft.com/office/drawing/2010/main" xmlns:ma14="http://schemas.microsoft.com/office/mac/drawingml/2011/main" val="1"/>
+              <ma14:wrappingTextBoxFlag xmlns:ma14="http://schemas.microsoft.com/office/mac/drawingml/2011/main" xmlns:a14="http://schemas.microsoft.com/office/drawing/2010/main" xmlns:m="http://schemas.openxmlformats.org/officeDocument/2006/math" xmlns="" val="1"/>
             </a:ext>
           </a:extLst>
         </p:spPr>
@@ -3370,8 +3370,55 @@
           </a:prstGeom>
         </p:spPr>
         <p:txBody>
-          <a:bodyPr/>
+          <a:bodyPr>
+            <a:normAutofit/>
+          </a:bodyPr>
           <a:lstStyle/>
+          <a:p>
+            <a:r>
+              <a:rPr lang="en-US" dirty="0"/>
+              <a:t>Comments on </a:t>
+            </a:r>
+          </a:p>
+          <a:p>
+            <a:pPr lvl="1"/>
+            <a:r>
+              <a:rPr lang="en-US" dirty="0"/>
+              <a:t>Quiz: make sure to understand foundational material</a:t>
+            </a:r>
+          </a:p>
+          <a:p>
+            <a:pPr lvl="1"/>
+            <a:r>
+              <a:rPr lang="en-US" dirty="0"/>
+              <a:t>Exercise 3</a:t>
+            </a:r>
+          </a:p>
+          <a:p>
+            <a:pPr lvl="2"/>
+            <a:r>
+              <a:rPr lang="en-US" dirty="0"/>
+              <a:t>Confirm MOR:G</a:t>
+            </a:r>
+            <a:r>
+              <a:rPr lang="el-GR" dirty="0"/>
+              <a:t>α</a:t>
+            </a:r>
+            <a:r>
+              <a:rPr lang="en-US" dirty="0"/>
+              <a:t> instability</a:t>
+            </a:r>
+          </a:p>
+          <a:p>
+            <a:pPr lvl="2"/>
+            <a:r>
+              <a:rPr lang="en-US" dirty="0"/>
+              <a:t>Carry over to Exercise 4</a:t>
+            </a:r>
+            <a:endParaRPr lang="en-US" u="sng" dirty="0">
+              <a:hlinkClick r:id="rId2"/>
+            </a:endParaRPr>
+          </a:p>
           <a:p>
             <a:r>
               <a:rPr u="sng" dirty="0">
@@ -3397,19 +3444,11 @@
             </a:r>
           </a:p>
           <a:p>
-            <a:pPr lvl="2"/>
+            <a:pPr lvl="1"/>
             <a:r>
               <a:rPr lang="en-US" dirty="0"/>
-              <a:t>Scientific literature</a:t>
-            </a:r>
-          </a:p>
-          <a:p>
-            <a:pPr lvl="2"/>
-            <a:r>
-              <a:rPr lang="en-US" dirty="0"/>
-              <a:t>Biological activity</a:t>
-            </a:r>
-            <a:endParaRPr dirty="0"/>
+              <a:t>Search strategies</a:t>
+            </a:r>
           </a:p>
           <a:p>
             <a:pPr lvl="1"/>
@@ -3422,12 +3461,6 @@
             <a:pPr lvl="1"/>
             <a:r>
               <a:rPr dirty="0"/>
-              <a:t>Search strategies</a:t>
-            </a:r>
-          </a:p>
-          <a:p>
-            <a:pPr lvl="1"/>
-            <a:r>
               <a:t>Zotero</a:t>
             </a:r>
             <a:endParaRPr lang="en-US" dirty="0"/>
@@ -3454,7 +3487,7 @@
           </a:prstGeom>
           <a:extLst>
             <a:ext uri="{C572A759-6A51-4108-AA02-DFA0A04FC94B}">
-              <ma14:wrappingTextBoxFlag xmlns="" xmlns:m="http://schemas.openxmlformats.org/officeDocument/2006/math" xmlns:a14="http://schemas.microsoft.com/office/drawing/2010/main" xmlns:ma14="http://schemas.microsoft.com/office/mac/drawingml/2011/main" val="1"/>
+              <ma14:wrappingTextBoxFlag xmlns:ma14="http://schemas.microsoft.com/office/mac/drawingml/2011/main" xmlns:a14="http://schemas.microsoft.com/office/drawing/2010/main" xmlns:m="http://schemas.openxmlformats.org/officeDocument/2006/math" xmlns="" val="1"/>
             </a:ext>
           </a:extLst>
         </p:spPr>
@@ -3685,7 +3718,7 @@
           </a:prstGeom>
           <a:extLst>
             <a:ext uri="{C572A759-6A51-4108-AA02-DFA0A04FC94B}">
-              <ma14:wrappingTextBoxFlag xmlns="" xmlns:m="http://schemas.openxmlformats.org/officeDocument/2006/math" xmlns:a14="http://schemas.microsoft.com/office/drawing/2010/main" xmlns:ma14="http://schemas.microsoft.com/office/mac/drawingml/2011/main" val="1"/>
+              <ma14:wrappingTextBoxFlag xmlns:ma14="http://schemas.microsoft.com/office/mac/drawingml/2011/main" xmlns:a14="http://schemas.microsoft.com/office/drawing/2010/main" xmlns:m="http://schemas.openxmlformats.org/officeDocument/2006/math" xmlns="" val="1"/>
             </a:ext>
           </a:extLst>
         </p:spPr>
@@ -3711,177 +3744,6 @@
 </file>
 
 <file path=ppt/slides/slide3.xml><?xml version="1.0" encoding="utf-8"?>
-<p:sld xmlns:a="http://schemas.openxmlformats.org/drawingml/2006/main" xmlns:r="http://schemas.openxmlformats.org/officeDocument/2006/relationships" xmlns:p="http://schemas.openxmlformats.org/presentationml/2006/main">
-  <p:cSld>
-    <p:spTree>
-      <p:nvGrpSpPr>
-        <p:cNvPr id="1" name=""/>
-        <p:cNvGrpSpPr/>
-        <p:nvPr/>
-      </p:nvGrpSpPr>
-      <p:grpSpPr>
-        <a:xfrm>
-          <a:off x="0" y="0"/>
-          <a:ext cx="0" cy="0"/>
-          <a:chOff x="0" y="0"/>
-          <a:chExt cx="0" cy="0"/>
-        </a:xfrm>
-      </p:grpSpPr>
-      <p:sp>
-        <p:nvSpPr>
-          <p:cNvPr id="150" name="Accessing articles"/>
-          <p:cNvSpPr txBox="1">
-            <a:spLocks noGrp="1"/>
-          </p:cNvSpPr>
-          <p:nvPr>
-            <p:ph type="title"/>
-          </p:nvPr>
-        </p:nvSpPr>
-        <p:spPr>
-          <a:prstGeom prst="rect">
-            <a:avLst/>
-          </a:prstGeom>
-        </p:spPr>
-        <p:txBody>
-          <a:bodyPr/>
-          <a:lstStyle/>
-          <a:p>
-            <a:r>
-              <a:t>Accessing articles</a:t>
-            </a:r>
-          </a:p>
-        </p:txBody>
-      </p:sp>
-      <p:sp>
-        <p:nvSpPr>
-          <p:cNvPr id="151" name="Free…"/>
-          <p:cNvSpPr txBox="1">
-            <a:spLocks noGrp="1"/>
-          </p:cNvSpPr>
-          <p:nvPr>
-            <p:ph type="body" idx="1"/>
-          </p:nvPr>
-        </p:nvSpPr>
-        <p:spPr>
-          <a:prstGeom prst="rect">
-            <a:avLst/>
-          </a:prstGeom>
-        </p:spPr>
-        <p:txBody>
-          <a:bodyPr/>
-          <a:lstStyle/>
-          <a:p>
-            <a:r>
-              <a:t>Free</a:t>
-            </a:r>
-          </a:p>
-          <a:p>
-            <a:pPr lvl="1"/>
-            <a:r>
-              <a:t>Open access - article is free online. Usually requires larger author payment</a:t>
-            </a:r>
-          </a:p>
-          <a:p>
-            <a:pPr lvl="1"/>
-            <a:r>
-              <a:t>Many NIH-funded articles are available online after one year</a:t>
-            </a:r>
-          </a:p>
-          <a:p>
-            <a:pPr lvl="1"/>
-            <a:r>
-              <a:t>Preprint servers, e.g. bioarXiv - free, but may not be peer reviewed</a:t>
-            </a:r>
-          </a:p>
-          <a:p>
-            <a:pPr lvl="1"/>
-            <a:r>
-              <a:t>Sometimes available from authors on their websites or upon request</a:t>
-            </a:r>
-          </a:p>
-          <a:p>
-            <a:r>
-              <a:t>Paywall</a:t>
-            </a:r>
-          </a:p>
-          <a:p>
-            <a:pPr lvl="1"/>
-            <a:r>
-              <a:t>IIT subscribes to a selection of scientific journals, which can be accessed</a:t>
-            </a:r>
-          </a:p>
-          <a:p>
-            <a:pPr lvl="2"/>
-            <a:r>
-              <a:t>in the library</a:t>
-            </a:r>
-          </a:p>
-          <a:p>
-            <a:pPr lvl="2"/>
-            <a:r>
-              <a:t>online from campus</a:t>
-            </a:r>
-          </a:p>
-          <a:p>
-            <a:pPr lvl="2"/>
-            <a:r>
-              <a:t>via a proxy server or VPN</a:t>
-            </a:r>
-          </a:p>
-          <a:p>
-            <a:pPr lvl="1"/>
-            <a:r>
-              <a:t>Interlibrary loan (MyILL) can be used to request nearly any article, but requires a lead time</a:t>
-            </a:r>
-          </a:p>
-        </p:txBody>
-      </p:sp>
-      <p:sp>
-        <p:nvSpPr>
-          <p:cNvPr id="152" name="Slide Number"/>
-          <p:cNvSpPr txBox="1">
-            <a:spLocks noGrp="1"/>
-          </p:cNvSpPr>
-          <p:nvPr>
-            <p:ph type="sldNum" sz="quarter" idx="2"/>
-          </p:nvPr>
-        </p:nvSpPr>
-        <p:spPr>
-          <a:xfrm>
-            <a:off x="12020548" y="13010554"/>
-            <a:ext cx="325045" cy="511176"/>
-          </a:xfrm>
-          <a:prstGeom prst="rect">
-            <a:avLst/>
-          </a:prstGeom>
-          <a:extLst>
-            <a:ext uri="{C572A759-6A51-4108-AA02-DFA0A04FC94B}">
-              <ma14:wrappingTextBoxFlag xmlns="" xmlns:m="http://schemas.openxmlformats.org/officeDocument/2006/math" xmlns:a14="http://schemas.microsoft.com/office/drawing/2010/main" xmlns:ma14="http://schemas.microsoft.com/office/mac/drawingml/2011/main" val="1"/>
-            </a:ext>
-          </a:extLst>
-        </p:spPr>
-        <p:txBody>
-          <a:bodyPr/>
-          <a:lstStyle/>
-          <a:p>
-            <a:fld id="{86CB4B4D-7CA3-9044-876B-883B54F8677D}" type="slidenum">
-              <a:rPr/>
-              <a:t>3</a:t>
-            </a:fld>
-            <a:endParaRPr/>
-          </a:p>
-        </p:txBody>
-      </p:sp>
-    </p:spTree>
-  </p:cSld>
-  <p:clrMapOvr>
-    <a:masterClrMapping/>
-  </p:clrMapOvr>
-  <p:transition spd="med"/>
-</p:sld>
-</file>
-
-<file path=ppt/slides/slide4.xml><?xml version="1.0" encoding="utf-8"?>
 <p:sld xmlns:a="http://schemas.openxmlformats.org/drawingml/2006/main" xmlns:r="http://schemas.openxmlformats.org/officeDocument/2006/relationships" xmlns:p="http://schemas.openxmlformats.org/presentationml/2006/main">
   <p:cSld>
     <p:spTree>
@@ -3995,7 +3857,7 @@
           </a:prstGeom>
           <a:extLst>
             <a:ext uri="{C572A759-6A51-4108-AA02-DFA0A04FC94B}">
-              <ma14:wrappingTextBoxFlag xmlns="" xmlns:m="http://schemas.openxmlformats.org/officeDocument/2006/math" xmlns:a14="http://schemas.microsoft.com/office/drawing/2010/main" xmlns:ma14="http://schemas.microsoft.com/office/mac/drawingml/2011/main" val="1"/>
+              <ma14:wrappingTextBoxFlag xmlns:ma14="http://schemas.microsoft.com/office/mac/drawingml/2011/main" xmlns:a14="http://schemas.microsoft.com/office/drawing/2010/main" xmlns:m="http://schemas.openxmlformats.org/officeDocument/2006/math" xmlns="" val="1"/>
             </a:ext>
           </a:extLst>
         </p:spPr>
@@ -4005,7 +3867,7 @@
           <a:p>
             <a:fld id="{86CB4B4D-7CA3-9044-876B-883B54F8677D}" type="slidenum">
               <a:rPr/>
-              <a:t>4</a:t>
+              <a:t>3</a:t>
             </a:fld>
             <a:endParaRPr/>
           </a:p>
@@ -4333,6 +4195,177 @@
 </p:sld>
 </file>
 
+<file path=ppt/slides/slide4.xml><?xml version="1.0" encoding="utf-8"?>
+<p:sld xmlns:a="http://schemas.openxmlformats.org/drawingml/2006/main" xmlns:r="http://schemas.openxmlformats.org/officeDocument/2006/relationships" xmlns:p="http://schemas.openxmlformats.org/presentationml/2006/main">
+  <p:cSld>
+    <p:spTree>
+      <p:nvGrpSpPr>
+        <p:cNvPr id="1" name=""/>
+        <p:cNvGrpSpPr/>
+        <p:nvPr/>
+      </p:nvGrpSpPr>
+      <p:grpSpPr>
+        <a:xfrm>
+          <a:off x="0" y="0"/>
+          <a:ext cx="0" cy="0"/>
+          <a:chOff x="0" y="0"/>
+          <a:chExt cx="0" cy="0"/>
+        </a:xfrm>
+      </p:grpSpPr>
+      <p:sp>
+        <p:nvSpPr>
+          <p:cNvPr id="150" name="Accessing articles"/>
+          <p:cNvSpPr txBox="1">
+            <a:spLocks noGrp="1"/>
+          </p:cNvSpPr>
+          <p:nvPr>
+            <p:ph type="title"/>
+          </p:nvPr>
+        </p:nvSpPr>
+        <p:spPr>
+          <a:prstGeom prst="rect">
+            <a:avLst/>
+          </a:prstGeom>
+        </p:spPr>
+        <p:txBody>
+          <a:bodyPr/>
+          <a:lstStyle/>
+          <a:p>
+            <a:r>
+              <a:t>Accessing articles</a:t>
+            </a:r>
+          </a:p>
+        </p:txBody>
+      </p:sp>
+      <p:sp>
+        <p:nvSpPr>
+          <p:cNvPr id="151" name="Free…"/>
+          <p:cNvSpPr txBox="1">
+            <a:spLocks noGrp="1"/>
+          </p:cNvSpPr>
+          <p:nvPr>
+            <p:ph type="body" idx="1"/>
+          </p:nvPr>
+        </p:nvSpPr>
+        <p:spPr>
+          <a:prstGeom prst="rect">
+            <a:avLst/>
+          </a:prstGeom>
+        </p:spPr>
+        <p:txBody>
+          <a:bodyPr/>
+          <a:lstStyle/>
+          <a:p>
+            <a:r>
+              <a:t>Free</a:t>
+            </a:r>
+          </a:p>
+          <a:p>
+            <a:pPr lvl="1"/>
+            <a:r>
+              <a:t>Open access - article is free online. Usually requires larger author payment</a:t>
+            </a:r>
+          </a:p>
+          <a:p>
+            <a:pPr lvl="1"/>
+            <a:r>
+              <a:t>Many NIH-funded articles are available online after one year</a:t>
+            </a:r>
+          </a:p>
+          <a:p>
+            <a:pPr lvl="1"/>
+            <a:r>
+              <a:t>Preprint servers, e.g. bioarXiv - free, but may not be peer reviewed</a:t>
+            </a:r>
+          </a:p>
+          <a:p>
+            <a:pPr lvl="1"/>
+            <a:r>
+              <a:t>Sometimes available from authors on their websites or upon request</a:t>
+            </a:r>
+          </a:p>
+          <a:p>
+            <a:r>
+              <a:t>Paywall</a:t>
+            </a:r>
+          </a:p>
+          <a:p>
+            <a:pPr lvl="1"/>
+            <a:r>
+              <a:t>IIT subscribes to a selection of scientific journals, which can be accessed</a:t>
+            </a:r>
+          </a:p>
+          <a:p>
+            <a:pPr lvl="2"/>
+            <a:r>
+              <a:t>in the library</a:t>
+            </a:r>
+          </a:p>
+          <a:p>
+            <a:pPr lvl="2"/>
+            <a:r>
+              <a:t>online from campus</a:t>
+            </a:r>
+          </a:p>
+          <a:p>
+            <a:pPr lvl="2"/>
+            <a:r>
+              <a:t>via a proxy server or VPN</a:t>
+            </a:r>
+          </a:p>
+          <a:p>
+            <a:pPr lvl="1"/>
+            <a:r>
+              <a:t>Interlibrary loan (MyILL) can be used to request nearly any article, but requires a lead time</a:t>
+            </a:r>
+          </a:p>
+        </p:txBody>
+      </p:sp>
+      <p:sp>
+        <p:nvSpPr>
+          <p:cNvPr id="152" name="Slide Number"/>
+          <p:cNvSpPr txBox="1">
+            <a:spLocks noGrp="1"/>
+          </p:cNvSpPr>
+          <p:nvPr>
+            <p:ph type="sldNum" sz="quarter" idx="2"/>
+          </p:nvPr>
+        </p:nvSpPr>
+        <p:spPr>
+          <a:xfrm>
+            <a:off x="12020548" y="13010554"/>
+            <a:ext cx="325045" cy="511176"/>
+          </a:xfrm>
+          <a:prstGeom prst="rect">
+            <a:avLst/>
+          </a:prstGeom>
+          <a:extLst>
+            <a:ext uri="{C572A759-6A51-4108-AA02-DFA0A04FC94B}">
+              <ma14:wrappingTextBoxFlag xmlns:ma14="http://schemas.microsoft.com/office/mac/drawingml/2011/main" xmlns:a14="http://schemas.microsoft.com/office/drawing/2010/main" xmlns:m="http://schemas.openxmlformats.org/officeDocument/2006/math" xmlns="" val="1"/>
+            </a:ext>
+          </a:extLst>
+        </p:spPr>
+        <p:txBody>
+          <a:bodyPr/>
+          <a:lstStyle/>
+          <a:p>
+            <a:fld id="{86CB4B4D-7CA3-9044-876B-883B54F8677D}" type="slidenum">
+              <a:rPr/>
+              <a:t>4</a:t>
+            </a:fld>
+            <a:endParaRPr/>
+          </a:p>
+        </p:txBody>
+      </p:sp>
+    </p:spTree>
+  </p:cSld>
+  <p:clrMapOvr>
+    <a:masterClrMapping/>
+  </p:clrMapOvr>
+  <p:transition spd="med"/>
+</p:sld>
+</file>
+
 <file path=ppt/slides/slide5.xml><?xml version="1.0" encoding="utf-8"?>
 <p:sld xmlns:a="http://schemas.openxmlformats.org/drawingml/2006/main" xmlns:r="http://schemas.openxmlformats.org/officeDocument/2006/relationships" xmlns:p="http://schemas.openxmlformats.org/presentationml/2006/main">
   <p:cSld>
@@ -4452,7 +4485,7 @@
           </a:prstGeom>
           <a:extLst>
             <a:ext uri="{C572A759-6A51-4108-AA02-DFA0A04FC94B}">
-              <ma14:wrappingTextBoxFlag xmlns="" xmlns:m="http://schemas.openxmlformats.org/officeDocument/2006/math" xmlns:a14="http://schemas.microsoft.com/office/drawing/2010/main" xmlns:ma14="http://schemas.microsoft.com/office/mac/drawingml/2011/main" val="1"/>
+              <ma14:wrappingTextBoxFlag xmlns:ma14="http://schemas.microsoft.com/office/mac/drawingml/2011/main" xmlns:a14="http://schemas.microsoft.com/office/drawing/2010/main" xmlns:m="http://schemas.openxmlformats.org/officeDocument/2006/math" xmlns="" val="1"/>
             </a:ext>
           </a:extLst>
         </p:spPr>
